--- a/images/arch.pptx
+++ b/images/arch.pptx
@@ -288,7 +288,7 @@
           <a:p>
             <a:fld id="{9E50BDAC-40CF-4CAB-92B6-8882156A02C4}" type="datetimeFigureOut">
               <a:rPr lang="zh-CN" altLang="en-US" smtClean="0"/>
-              <a:t>2026/5/7</a:t>
+              <a:t>2026/5/8</a:t>
             </a:fld>
             <a:endParaRPr lang="zh-CN" altLang="en-US"/>
           </a:p>
@@ -458,7 +458,7 @@
           <a:p>
             <a:fld id="{9E50BDAC-40CF-4CAB-92B6-8882156A02C4}" type="datetimeFigureOut">
               <a:rPr lang="zh-CN" altLang="en-US" smtClean="0"/>
-              <a:t>2026/5/7</a:t>
+              <a:t>2026/5/8</a:t>
             </a:fld>
             <a:endParaRPr lang="zh-CN" altLang="en-US"/>
           </a:p>
@@ -638,7 +638,7 @@
           <a:p>
             <a:fld id="{9E50BDAC-40CF-4CAB-92B6-8882156A02C4}" type="datetimeFigureOut">
               <a:rPr lang="zh-CN" altLang="en-US" smtClean="0"/>
-              <a:t>2026/5/7</a:t>
+              <a:t>2026/5/8</a:t>
             </a:fld>
             <a:endParaRPr lang="zh-CN" altLang="en-US"/>
           </a:p>
@@ -808,7 +808,7 @@
           <a:p>
             <a:fld id="{9E50BDAC-40CF-4CAB-92B6-8882156A02C4}" type="datetimeFigureOut">
               <a:rPr lang="zh-CN" altLang="en-US" smtClean="0"/>
-              <a:t>2026/5/7</a:t>
+              <a:t>2026/5/8</a:t>
             </a:fld>
             <a:endParaRPr lang="zh-CN" altLang="en-US"/>
           </a:p>
@@ -1054,7 +1054,7 @@
           <a:p>
             <a:fld id="{9E50BDAC-40CF-4CAB-92B6-8882156A02C4}" type="datetimeFigureOut">
               <a:rPr lang="zh-CN" altLang="en-US" smtClean="0"/>
-              <a:t>2026/5/7</a:t>
+              <a:t>2026/5/8</a:t>
             </a:fld>
             <a:endParaRPr lang="zh-CN" altLang="en-US"/>
           </a:p>
@@ -1342,7 +1342,7 @@
           <a:p>
             <a:fld id="{9E50BDAC-40CF-4CAB-92B6-8882156A02C4}" type="datetimeFigureOut">
               <a:rPr lang="zh-CN" altLang="en-US" smtClean="0"/>
-              <a:t>2026/5/7</a:t>
+              <a:t>2026/5/8</a:t>
             </a:fld>
             <a:endParaRPr lang="zh-CN" altLang="en-US"/>
           </a:p>
@@ -1764,7 +1764,7 @@
           <a:p>
             <a:fld id="{9E50BDAC-40CF-4CAB-92B6-8882156A02C4}" type="datetimeFigureOut">
               <a:rPr lang="zh-CN" altLang="en-US" smtClean="0"/>
-              <a:t>2026/5/7</a:t>
+              <a:t>2026/5/8</a:t>
             </a:fld>
             <a:endParaRPr lang="zh-CN" altLang="en-US"/>
           </a:p>
@@ -1882,7 +1882,7 @@
           <a:p>
             <a:fld id="{9E50BDAC-40CF-4CAB-92B6-8882156A02C4}" type="datetimeFigureOut">
               <a:rPr lang="zh-CN" altLang="en-US" smtClean="0"/>
-              <a:t>2026/5/7</a:t>
+              <a:t>2026/5/8</a:t>
             </a:fld>
             <a:endParaRPr lang="zh-CN" altLang="en-US"/>
           </a:p>
@@ -1977,7 +1977,7 @@
           <a:p>
             <a:fld id="{9E50BDAC-40CF-4CAB-92B6-8882156A02C4}" type="datetimeFigureOut">
               <a:rPr lang="zh-CN" altLang="en-US" smtClean="0"/>
-              <a:t>2026/5/7</a:t>
+              <a:t>2026/5/8</a:t>
             </a:fld>
             <a:endParaRPr lang="zh-CN" altLang="en-US"/>
           </a:p>
@@ -2254,7 +2254,7 @@
           <a:p>
             <a:fld id="{9E50BDAC-40CF-4CAB-92B6-8882156A02C4}" type="datetimeFigureOut">
               <a:rPr lang="zh-CN" altLang="en-US" smtClean="0"/>
-              <a:t>2026/5/7</a:t>
+              <a:t>2026/5/8</a:t>
             </a:fld>
             <a:endParaRPr lang="zh-CN" altLang="en-US"/>
           </a:p>
@@ -2507,7 +2507,7 @@
           <a:p>
             <a:fld id="{9E50BDAC-40CF-4CAB-92B6-8882156A02C4}" type="datetimeFigureOut">
               <a:rPr lang="zh-CN" altLang="en-US" smtClean="0"/>
-              <a:t>2026/5/7</a:t>
+              <a:t>2026/5/8</a:t>
             </a:fld>
             <a:endParaRPr lang="zh-CN" altLang="en-US"/>
           </a:p>
@@ -2720,7 +2720,7 @@
           <a:p>
             <a:fld id="{9E50BDAC-40CF-4CAB-92B6-8882156A02C4}" type="datetimeFigureOut">
               <a:rPr lang="zh-CN" altLang="en-US" smtClean="0"/>
-              <a:t>2026/5/7</a:t>
+              <a:t>2026/5/8</a:t>
             </a:fld>
             <a:endParaRPr lang="zh-CN" altLang="en-US"/>
           </a:p>
@@ -3522,14 +3522,14 @@
           <a:lstStyle/>
           <a:p>
             <a:r>
-              <a:rPr lang="zh-CN" altLang="en-US" dirty="0" smtClean="0">
+              <a:rPr lang="en-US" altLang="zh-CN" dirty="0">
                 <a:solidFill>
                   <a:schemeClr val="tx1"/>
                 </a:solidFill>
                 <a:latin typeface="微软雅黑" panose="020B0503020204020204" pitchFamily="34" charset="-122"/>
                 <a:ea typeface="微软雅黑" panose="020B0503020204020204" pitchFamily="34" charset="-122"/>
               </a:rPr>
-              <a:t>车载系统</a:t>
+              <a:t>In-vehicle System</a:t>
             </a:r>
             <a:endParaRPr lang="zh-CN" altLang="en-US" dirty="0">
               <a:solidFill>
@@ -3677,7 +3677,14 @@
             <a:avLst/>
           </a:prstGeom>
           <a:noFill/>
-          <a:ln w="6350"/>
+          <a:ln w="6350">
+            <a:solidFill>
+              <a:schemeClr val="accent3">
+                <a:lumMod val="40000"/>
+                <a:lumOff val="60000"/>
+              </a:schemeClr>
+            </a:solidFill>
+          </a:ln>
         </p:spPr>
         <p:style>
           <a:lnRef idx="2">
@@ -3735,7 +3742,14 @@
             <a:avLst/>
           </a:prstGeom>
           <a:noFill/>
-          <a:ln w="6350"/>
+          <a:ln w="6350">
+            <a:solidFill>
+              <a:schemeClr val="accent3">
+                <a:lumMod val="40000"/>
+                <a:lumOff val="60000"/>
+              </a:schemeClr>
+            </a:solidFill>
+          </a:ln>
         </p:spPr>
         <p:style>
           <a:lnRef idx="2">
@@ -3787,7 +3801,7 @@
         <p:spPr>
           <a:xfrm>
             <a:off x="6536886" y="1927477"/>
-            <a:ext cx="2968245" cy="1857420"/>
+            <a:ext cx="3172389" cy="1563837"/>
           </a:xfrm>
           <a:prstGeom prst="rect">
             <a:avLst/>
@@ -3850,7 +3864,14 @@
             <a:avLst/>
           </a:prstGeom>
           <a:noFill/>
-          <a:ln w="6350"/>
+          <a:ln w="6350">
+            <a:solidFill>
+              <a:schemeClr val="accent3">
+                <a:lumMod val="40000"/>
+                <a:lumOff val="60000"/>
+              </a:schemeClr>
+            </a:solidFill>
+          </a:ln>
         </p:spPr>
         <p:style>
           <a:lnRef idx="2">
@@ -4119,137 +4140,84 @@
           </a:p>
         </p:txBody>
       </p:sp>
-      <p:grpSp>
-        <p:nvGrpSpPr>
-          <p:cNvPr id="14" name="组合 13"/>
-          <p:cNvGrpSpPr/>
+      <p:sp>
+        <p:nvSpPr>
+          <p:cNvPr id="28" name="矩形 27"/>
+          <p:cNvSpPr/>
           <p:nvPr/>
-        </p:nvGrpSpPr>
-        <p:grpSpPr>
+        </p:nvSpPr>
+        <p:spPr>
           <a:xfrm>
-            <a:off x="6657208" y="2491216"/>
-            <a:ext cx="775851" cy="853499"/>
-            <a:chOff x="6156176" y="2342985"/>
-            <a:chExt cx="1296144" cy="529065"/>
-          </a:xfrm>
-        </p:grpSpPr>
-        <p:sp>
-          <p:nvSpPr>
-            <p:cNvPr id="28" name="矩形 27"/>
-            <p:cNvSpPr/>
-            <p:nvPr/>
-          </p:nvSpPr>
-          <p:spPr>
-            <a:xfrm>
-              <a:off x="6156176" y="2342985"/>
-              <a:ext cx="1296144" cy="238014"/>
-            </a:xfrm>
-            <a:prstGeom prst="rect">
-              <a:avLst/>
-            </a:prstGeom>
-            <a:noFill/>
-            <a:ln w="6350"/>
-          </p:spPr>
-          <p:style>
-            <a:lnRef idx="2">
-              <a:schemeClr val="accent1">
-                <a:shade val="50000"/>
+            <a:off x="6857116" y="2420888"/>
+            <a:ext cx="895680" cy="383969"/>
+          </a:xfrm>
+          <a:prstGeom prst="rect">
+            <a:avLst/>
+          </a:prstGeom>
+          <a:noFill/>
+          <a:ln w="6350">
+            <a:solidFill>
+              <a:schemeClr val="accent3">
+                <a:lumMod val="40000"/>
+                <a:lumOff val="60000"/>
               </a:schemeClr>
-            </a:lnRef>
-            <a:fillRef idx="1">
-              <a:schemeClr val="accent1"/>
-            </a:fillRef>
-            <a:effectRef idx="0">
-              <a:schemeClr val="accent1"/>
-            </a:effectRef>
-            <a:fontRef idx="minor">
-              <a:schemeClr val="lt1"/>
-            </a:fontRef>
-          </p:style>
-          <p:txBody>
-            <a:bodyPr rtlCol="0" anchor="ctr"/>
-            <a:lstStyle/>
-            <a:p>
-              <a:pPr algn="ctr"/>
-              <a:r>
-                <a:rPr lang="en-US" altLang="zh-CN" sz="1100" dirty="0" smtClean="0">
-                  <a:solidFill>
-                    <a:schemeClr val="tx1"/>
-                  </a:solidFill>
-                  <a:latin typeface="微软雅黑" panose="020B0503020204020204" pitchFamily="34" charset="-122"/>
-                  <a:ea typeface="微软雅黑" panose="020B0503020204020204" pitchFamily="34" charset="-122"/>
-                </a:rPr>
-                <a:t>Audio Receiver</a:t>
-              </a:r>
-              <a:endParaRPr lang="zh-CN" altLang="en-US" sz="1100" dirty="0">
+            </a:solidFill>
+          </a:ln>
+        </p:spPr>
+        <p:style>
+          <a:lnRef idx="2">
+            <a:schemeClr val="accent1">
+              <a:shade val="50000"/>
+            </a:schemeClr>
+          </a:lnRef>
+          <a:fillRef idx="1">
+            <a:schemeClr val="accent1"/>
+          </a:fillRef>
+          <a:effectRef idx="0">
+            <a:schemeClr val="accent1"/>
+          </a:effectRef>
+          <a:fontRef idx="minor">
+            <a:schemeClr val="lt1"/>
+          </a:fontRef>
+        </p:style>
+        <p:txBody>
+          <a:bodyPr rtlCol="0" anchor="ctr"/>
+          <a:lstStyle/>
+          <a:p>
+            <a:pPr algn="ctr"/>
+            <a:r>
+              <a:rPr lang="en-US" altLang="zh-CN" sz="1050" dirty="0" smtClean="0">
                 <a:solidFill>
                   <a:schemeClr val="tx1"/>
                 </a:solidFill>
                 <a:latin typeface="微软雅黑" panose="020B0503020204020204" pitchFamily="34" charset="-122"/>
                 <a:ea typeface="微软雅黑" panose="020B0503020204020204" pitchFamily="34" charset="-122"/>
-              </a:endParaRPr>
-            </a:p>
-          </p:txBody>
-        </p:sp>
-        <p:sp>
-          <p:nvSpPr>
-            <p:cNvPr id="29" name="矩形 28"/>
-            <p:cNvSpPr/>
-            <p:nvPr/>
-          </p:nvSpPr>
-          <p:spPr>
-            <a:xfrm>
-              <a:off x="6156176" y="2634036"/>
-              <a:ext cx="1296144" cy="238014"/>
-            </a:xfrm>
-            <a:prstGeom prst="rect">
-              <a:avLst/>
-            </a:prstGeom>
-            <a:noFill/>
-            <a:ln w="6350"/>
-          </p:spPr>
-          <p:style>
-            <a:lnRef idx="2">
-              <a:schemeClr val="accent1">
-                <a:shade val="50000"/>
-              </a:schemeClr>
-            </a:lnRef>
-            <a:fillRef idx="1">
-              <a:schemeClr val="accent1"/>
-            </a:fillRef>
-            <a:effectRef idx="0">
-              <a:schemeClr val="accent1"/>
-            </a:effectRef>
-            <a:fontRef idx="minor">
-              <a:schemeClr val="lt1"/>
-            </a:fontRef>
-          </p:style>
-          <p:txBody>
-            <a:bodyPr rtlCol="0" anchor="ctr"/>
-            <a:lstStyle/>
-            <a:p>
-              <a:pPr algn="ctr"/>
-              <a:r>
-                <a:rPr lang="en-US" altLang="zh-CN" sz="1100" dirty="0" smtClean="0">
-                  <a:solidFill>
-                    <a:schemeClr val="tx1"/>
-                  </a:solidFill>
-                  <a:latin typeface="微软雅黑" panose="020B0503020204020204" pitchFamily="34" charset="-122"/>
-                  <a:ea typeface="微软雅黑" panose="020B0503020204020204" pitchFamily="34" charset="-122"/>
-                </a:rPr>
-                <a:t>PS2 Receiver</a:t>
-              </a:r>
-              <a:endParaRPr lang="zh-CN" altLang="en-US" sz="1100" dirty="0">
+              </a:rPr>
+              <a:t>Command</a:t>
+            </a:r>
+          </a:p>
+          <a:p>
+            <a:pPr algn="ctr"/>
+            <a:r>
+              <a:rPr lang="en-US" altLang="zh-CN" sz="1050" dirty="0" smtClean="0">
                 <a:solidFill>
                   <a:schemeClr val="tx1"/>
                 </a:solidFill>
                 <a:latin typeface="微软雅黑" panose="020B0503020204020204" pitchFamily="34" charset="-122"/>
                 <a:ea typeface="微软雅黑" panose="020B0503020204020204" pitchFamily="34" charset="-122"/>
-              </a:endParaRPr>
-            </a:p>
-          </p:txBody>
-        </p:sp>
-      </p:grpSp>
+              </a:rPr>
+              <a:t>Receiver</a:t>
+            </a:r>
+            <a:endParaRPr lang="zh-CN" altLang="en-US" sz="1050" dirty="0">
+              <a:solidFill>
+                <a:schemeClr val="tx1"/>
+              </a:solidFill>
+              <a:latin typeface="微软雅黑" panose="020B0503020204020204" pitchFamily="34" charset="-122"/>
+              <a:ea typeface="微软雅黑" panose="020B0503020204020204" pitchFamily="34" charset="-122"/>
+            </a:endParaRPr>
+          </a:p>
+        </p:txBody>
+      </p:sp>
       <p:pic>
         <p:nvPicPr>
           <p:cNvPr id="1043" name="Picture 19"/>
@@ -4352,492 +4320,127 @@
           </a:fontRef>
         </p:style>
       </p:cxnSp>
-      <p:grpSp>
-        <p:nvGrpSpPr>
-          <p:cNvPr id="63" name="组合 62"/>
-          <p:cNvGrpSpPr/>
+      <p:sp>
+        <p:nvSpPr>
+          <p:cNvPr id="31" name="矩形 30"/>
+          <p:cNvSpPr/>
           <p:nvPr/>
-        </p:nvGrpSpPr>
-        <p:grpSpPr>
+        </p:nvSpPr>
+        <p:spPr>
           <a:xfrm>
-            <a:off x="5927591" y="2141488"/>
-            <a:ext cx="704302" cy="593234"/>
-            <a:chOff x="5927591" y="2141488"/>
-            <a:chExt cx="704302" cy="593234"/>
-          </a:xfrm>
-        </p:grpSpPr>
-        <p:sp>
-          <p:nvSpPr>
-            <p:cNvPr id="31" name="矩形 30"/>
-            <p:cNvSpPr/>
-            <p:nvPr/>
-          </p:nvSpPr>
-          <p:spPr>
-            <a:xfrm>
-              <a:off x="6009950" y="2183514"/>
-              <a:ext cx="207490" cy="205029"/>
-            </a:xfrm>
-            <a:prstGeom prst="rect">
-              <a:avLst/>
-            </a:prstGeom>
-            <a:solidFill>
-              <a:schemeClr val="bg1"/>
-            </a:solidFill>
-            <a:ln w="12700"/>
-          </p:spPr>
-          <p:style>
-            <a:lnRef idx="2">
-              <a:schemeClr val="accent1">
-                <a:shade val="50000"/>
-              </a:schemeClr>
-            </a:lnRef>
-            <a:fillRef idx="1">
-              <a:schemeClr val="accent1"/>
-            </a:fillRef>
-            <a:effectRef idx="0">
-              <a:schemeClr val="accent1"/>
-            </a:effectRef>
-            <a:fontRef idx="minor">
-              <a:schemeClr val="lt1"/>
-            </a:fontRef>
-          </p:style>
-          <p:txBody>
-            <a:bodyPr rtlCol="0" anchor="ctr"/>
-            <a:lstStyle/>
-            <a:p>
-              <a:pPr algn="ctr"/>
-              <a:endParaRPr lang="zh-CN" altLang="en-US" sz="800" dirty="0"/>
-            </a:p>
-          </p:txBody>
-        </p:sp>
-        <p:sp>
-          <p:nvSpPr>
-            <p:cNvPr id="43" name="矩形 42"/>
-            <p:cNvSpPr/>
-            <p:nvPr/>
-          </p:nvSpPr>
-          <p:spPr>
-            <a:xfrm>
-              <a:off x="6018890" y="2499748"/>
-              <a:ext cx="207490" cy="205029"/>
-            </a:xfrm>
-            <a:prstGeom prst="rect">
-              <a:avLst/>
-            </a:prstGeom>
-            <a:solidFill>
-              <a:schemeClr val="bg1"/>
-            </a:solidFill>
-            <a:ln w="12700"/>
-          </p:spPr>
-          <p:style>
-            <a:lnRef idx="2">
-              <a:schemeClr val="accent1">
-                <a:shade val="50000"/>
-              </a:schemeClr>
-            </a:lnRef>
-            <a:fillRef idx="1">
-              <a:schemeClr val="accent1"/>
-            </a:fillRef>
-            <a:effectRef idx="0">
-              <a:schemeClr val="accent1"/>
-            </a:effectRef>
-            <a:fontRef idx="minor">
-              <a:schemeClr val="lt1"/>
-            </a:fontRef>
-          </p:style>
-          <p:txBody>
-            <a:bodyPr rtlCol="0" anchor="ctr"/>
-            <a:lstStyle/>
-            <a:p>
-              <a:pPr algn="ctr"/>
-              <a:endParaRPr lang="zh-CN" altLang="en-US" sz="800" dirty="0"/>
-            </a:p>
-          </p:txBody>
-        </p:sp>
-        <p:sp>
-          <p:nvSpPr>
-            <p:cNvPr id="44" name="矩形 43"/>
-            <p:cNvSpPr/>
-            <p:nvPr/>
-          </p:nvSpPr>
-          <p:spPr>
-            <a:xfrm>
-              <a:off x="6412955" y="2183514"/>
-              <a:ext cx="207490" cy="205029"/>
-            </a:xfrm>
-            <a:prstGeom prst="rect">
-              <a:avLst/>
-            </a:prstGeom>
-            <a:solidFill>
-              <a:schemeClr val="bg1"/>
-            </a:solidFill>
-            <a:ln w="12700"/>
-          </p:spPr>
-          <p:style>
-            <a:lnRef idx="2">
-              <a:schemeClr val="accent1">
-                <a:shade val="50000"/>
-              </a:schemeClr>
-            </a:lnRef>
-            <a:fillRef idx="1">
-              <a:schemeClr val="accent1"/>
-            </a:fillRef>
-            <a:effectRef idx="0">
-              <a:schemeClr val="accent1"/>
-            </a:effectRef>
-            <a:fontRef idx="minor">
-              <a:schemeClr val="lt1"/>
-            </a:fontRef>
-          </p:style>
-          <p:txBody>
-            <a:bodyPr rtlCol="0" anchor="ctr"/>
-            <a:lstStyle/>
-            <a:p>
-              <a:pPr algn="ctr"/>
-              <a:endParaRPr lang="zh-CN" altLang="en-US" sz="800" dirty="0"/>
-            </a:p>
-          </p:txBody>
-        </p:sp>
-        <p:sp>
-          <p:nvSpPr>
-            <p:cNvPr id="45" name="矩形 44"/>
-            <p:cNvSpPr/>
-            <p:nvPr/>
-          </p:nvSpPr>
-          <p:spPr>
-            <a:xfrm>
-              <a:off x="6421896" y="2499748"/>
-              <a:ext cx="207490" cy="205029"/>
-            </a:xfrm>
-            <a:prstGeom prst="rect">
-              <a:avLst/>
-            </a:prstGeom>
-            <a:solidFill>
-              <a:schemeClr val="bg1"/>
-            </a:solidFill>
-            <a:ln w="12700"/>
-          </p:spPr>
-          <p:style>
-            <a:lnRef idx="2">
-              <a:schemeClr val="accent1">
-                <a:shade val="50000"/>
-              </a:schemeClr>
-            </a:lnRef>
-            <a:fillRef idx="1">
-              <a:schemeClr val="accent1"/>
-            </a:fillRef>
-            <a:effectRef idx="0">
-              <a:schemeClr val="accent1"/>
-            </a:effectRef>
-            <a:fontRef idx="minor">
-              <a:schemeClr val="lt1"/>
-            </a:fontRef>
-          </p:style>
-          <p:txBody>
-            <a:bodyPr rtlCol="0" anchor="ctr"/>
-            <a:lstStyle/>
-            <a:p>
-              <a:pPr algn="ctr"/>
-              <a:endParaRPr lang="zh-CN" altLang="en-US"/>
-            </a:p>
-          </p:txBody>
-        </p:sp>
-        <p:cxnSp>
-          <p:nvCxnSpPr>
-            <p:cNvPr id="33" name="直接连接符 32"/>
-            <p:cNvCxnSpPr>
-              <a:stCxn id="31" idx="3"/>
-              <a:endCxn id="44" idx="1"/>
-            </p:cNvCxnSpPr>
-            <p:nvPr/>
-          </p:nvCxnSpPr>
-          <p:spPr>
-            <a:xfrm>
-              <a:off x="6217439" y="2286028"/>
-              <a:ext cx="195516" cy="0"/>
-            </a:xfrm>
-            <a:prstGeom prst="line">
-              <a:avLst/>
-            </a:prstGeom>
-          </p:spPr>
-          <p:style>
-            <a:lnRef idx="1">
-              <a:schemeClr val="accent1"/>
-            </a:lnRef>
-            <a:fillRef idx="0">
-              <a:schemeClr val="accent1"/>
-            </a:fillRef>
-            <a:effectRef idx="0">
-              <a:schemeClr val="accent1"/>
-            </a:effectRef>
-            <a:fontRef idx="minor">
-              <a:schemeClr val="tx1"/>
-            </a:fontRef>
-          </p:style>
-        </p:cxnSp>
-        <p:cxnSp>
-          <p:nvCxnSpPr>
-            <p:cNvPr id="35" name="直接连接符 34"/>
-            <p:cNvCxnSpPr>
-              <a:stCxn id="43" idx="3"/>
-              <a:endCxn id="45" idx="1"/>
-            </p:cNvCxnSpPr>
-            <p:nvPr/>
-          </p:nvCxnSpPr>
-          <p:spPr>
-            <a:xfrm>
-              <a:off x="6226380" y="2602263"/>
-              <a:ext cx="195516" cy="0"/>
-            </a:xfrm>
-            <a:prstGeom prst="line">
-              <a:avLst/>
-            </a:prstGeom>
-          </p:spPr>
-          <p:style>
-            <a:lnRef idx="1">
-              <a:schemeClr val="accent1"/>
-            </a:lnRef>
-            <a:fillRef idx="0">
-              <a:schemeClr val="accent1"/>
-            </a:fillRef>
-            <a:effectRef idx="0">
-              <a:schemeClr val="accent1"/>
-            </a:effectRef>
-            <a:fontRef idx="minor">
-              <a:schemeClr val="tx1"/>
-            </a:fontRef>
-          </p:style>
-        </p:cxnSp>
-        <p:grpSp>
-          <p:nvGrpSpPr>
-            <p:cNvPr id="62" name="组合 61"/>
-            <p:cNvGrpSpPr/>
-            <p:nvPr/>
-          </p:nvGrpSpPr>
-          <p:grpSpPr>
-            <a:xfrm>
-              <a:off x="5927591" y="2141488"/>
-              <a:ext cx="704302" cy="593234"/>
-              <a:chOff x="6009872" y="4552925"/>
-              <a:chExt cx="704302" cy="593234"/>
-            </a:xfrm>
-          </p:grpSpPr>
-          <p:sp>
-            <p:nvSpPr>
-              <p:cNvPr id="36" name="TextBox 35"/>
-              <p:cNvSpPr txBox="1"/>
-              <p:nvPr/>
-            </p:nvSpPr>
-            <p:spPr>
-              <a:xfrm>
-                <a:off x="6009872" y="4552925"/>
-                <a:ext cx="288707" cy="276999"/>
-              </a:xfrm>
-              <a:prstGeom prst="rect">
-                <a:avLst/>
-              </a:prstGeom>
-              <a:noFill/>
-            </p:spPr>
-            <p:txBody>
-              <a:bodyPr wrap="none" rtlCol="0">
-                <a:spAutoFit/>
-              </a:bodyPr>
-              <a:lstStyle/>
-              <a:p>
-                <a:r>
-                  <a:rPr lang="en-US" altLang="zh-CN" sz="1200" dirty="0" smtClean="0"/>
-                  <a:t>RX</a:t>
-                </a:r>
-                <a:endParaRPr lang="zh-CN" altLang="en-US" sz="1200" dirty="0"/>
-              </a:p>
-            </p:txBody>
-          </p:sp>
-          <p:sp>
-            <p:nvSpPr>
-              <p:cNvPr id="55" name="TextBox 54"/>
-              <p:cNvSpPr txBox="1"/>
-              <p:nvPr/>
-            </p:nvSpPr>
-            <p:spPr>
-              <a:xfrm>
-                <a:off x="6015434" y="4869159"/>
-                <a:ext cx="282061" cy="276999"/>
-              </a:xfrm>
-              <a:prstGeom prst="rect">
-                <a:avLst/>
-              </a:prstGeom>
-              <a:noFill/>
-            </p:spPr>
-            <p:txBody>
-              <a:bodyPr wrap="none" rtlCol="0">
-                <a:spAutoFit/>
-              </a:bodyPr>
-              <a:lstStyle/>
-              <a:p>
-                <a:r>
-                  <a:rPr lang="en-US" altLang="zh-CN" sz="1200" dirty="0" smtClean="0"/>
-                  <a:t>TX</a:t>
-                </a:r>
-                <a:endParaRPr lang="zh-CN" altLang="en-US" sz="1200" dirty="0"/>
-              </a:p>
-            </p:txBody>
-          </p:sp>
-          <p:sp>
-            <p:nvSpPr>
-              <p:cNvPr id="56" name="TextBox 35"/>
-              <p:cNvSpPr txBox="1"/>
-              <p:nvPr/>
-            </p:nvSpPr>
-            <p:spPr>
-              <a:xfrm>
-                <a:off x="6432113" y="4557647"/>
-                <a:ext cx="282061" cy="276999"/>
-              </a:xfrm>
-              <a:prstGeom prst="rect">
-                <a:avLst/>
-              </a:prstGeom>
-              <a:noFill/>
-            </p:spPr>
-            <p:txBody>
-              <a:bodyPr wrap="none" rtlCol="0">
-                <a:spAutoFit/>
-              </a:bodyPr>
-              <a:lstStyle>
-                <a:defPPr>
-                  <a:defRPr lang="zh-CN"/>
-                </a:defPPr>
-                <a:lvl1pPr marL="0" algn="l" defTabSz="914400" rtl="0" eaLnBrk="1" latinLnBrk="0" hangingPunct="1">
-                  <a:defRPr sz="1800" kern="1200">
-                    <a:solidFill>
-                      <a:schemeClr val="tx1"/>
-                    </a:solidFill>
-                    <a:latin typeface="+mn-lt"/>
-                    <a:ea typeface="+mn-ea"/>
-                    <a:cs typeface="+mn-cs"/>
-                  </a:defRPr>
-                </a:lvl1pPr>
-                <a:lvl2pPr marL="457200" algn="l" defTabSz="914400" rtl="0" eaLnBrk="1" latinLnBrk="0" hangingPunct="1">
-                  <a:defRPr sz="1800" kern="1200">
-                    <a:solidFill>
-                      <a:schemeClr val="tx1"/>
-                    </a:solidFill>
-                    <a:latin typeface="+mn-lt"/>
-                    <a:ea typeface="+mn-ea"/>
-                    <a:cs typeface="+mn-cs"/>
-                  </a:defRPr>
-                </a:lvl2pPr>
-                <a:lvl3pPr marL="914400" algn="l" defTabSz="914400" rtl="0" eaLnBrk="1" latinLnBrk="0" hangingPunct="1">
-                  <a:defRPr sz="1800" kern="1200">
-                    <a:solidFill>
-                      <a:schemeClr val="tx1"/>
-                    </a:solidFill>
-                    <a:latin typeface="+mn-lt"/>
-                    <a:ea typeface="+mn-ea"/>
-                    <a:cs typeface="+mn-cs"/>
-                  </a:defRPr>
-                </a:lvl3pPr>
-                <a:lvl4pPr marL="1371600" algn="l" defTabSz="914400" rtl="0" eaLnBrk="1" latinLnBrk="0" hangingPunct="1">
-                  <a:defRPr sz="1800" kern="1200">
-                    <a:solidFill>
-                      <a:schemeClr val="tx1"/>
-                    </a:solidFill>
-                    <a:latin typeface="+mn-lt"/>
-                    <a:ea typeface="+mn-ea"/>
-                    <a:cs typeface="+mn-cs"/>
-                  </a:defRPr>
-                </a:lvl4pPr>
-                <a:lvl5pPr marL="1828800" algn="l" defTabSz="914400" rtl="0" eaLnBrk="1" latinLnBrk="0" hangingPunct="1">
-                  <a:defRPr sz="1800" kern="1200">
-                    <a:solidFill>
-                      <a:schemeClr val="tx1"/>
-                    </a:solidFill>
-                    <a:latin typeface="+mn-lt"/>
-                    <a:ea typeface="+mn-ea"/>
-                    <a:cs typeface="+mn-cs"/>
-                  </a:defRPr>
-                </a:lvl5pPr>
-                <a:lvl6pPr marL="2286000" algn="l" defTabSz="914400" rtl="0" eaLnBrk="1" latinLnBrk="0" hangingPunct="1">
-                  <a:defRPr sz="1800" kern="1200">
-                    <a:solidFill>
-                      <a:schemeClr val="tx1"/>
-                    </a:solidFill>
-                    <a:latin typeface="+mn-lt"/>
-                    <a:ea typeface="+mn-ea"/>
-                    <a:cs typeface="+mn-cs"/>
-                  </a:defRPr>
-                </a:lvl6pPr>
-                <a:lvl7pPr marL="2743200" algn="l" defTabSz="914400" rtl="0" eaLnBrk="1" latinLnBrk="0" hangingPunct="1">
-                  <a:defRPr sz="1800" kern="1200">
-                    <a:solidFill>
-                      <a:schemeClr val="tx1"/>
-                    </a:solidFill>
-                    <a:latin typeface="+mn-lt"/>
-                    <a:ea typeface="+mn-ea"/>
-                    <a:cs typeface="+mn-cs"/>
-                  </a:defRPr>
-                </a:lvl7pPr>
-                <a:lvl8pPr marL="3200400" algn="l" defTabSz="914400" rtl="0" eaLnBrk="1" latinLnBrk="0" hangingPunct="1">
-                  <a:defRPr sz="1800" kern="1200">
-                    <a:solidFill>
-                      <a:schemeClr val="tx1"/>
-                    </a:solidFill>
-                    <a:latin typeface="+mn-lt"/>
-                    <a:ea typeface="+mn-ea"/>
-                    <a:cs typeface="+mn-cs"/>
-                  </a:defRPr>
-                </a:lvl8pPr>
-                <a:lvl9pPr marL="3657600" algn="l" defTabSz="914400" rtl="0" eaLnBrk="1" latinLnBrk="0" hangingPunct="1">
-                  <a:defRPr sz="1800" kern="1200">
-                    <a:solidFill>
-                      <a:schemeClr val="tx1"/>
-                    </a:solidFill>
-                    <a:latin typeface="+mn-lt"/>
-                    <a:ea typeface="+mn-ea"/>
-                    <a:cs typeface="+mn-cs"/>
-                  </a:defRPr>
-                </a:lvl9pPr>
-              </a:lstStyle>
-              <a:p>
-                <a:r>
-                  <a:rPr lang="en-US" altLang="zh-CN" sz="1200" dirty="0" smtClean="0"/>
-                  <a:t>TX</a:t>
-                </a:r>
-                <a:endParaRPr lang="zh-CN" altLang="en-US" sz="1200" dirty="0"/>
-              </a:p>
-            </p:txBody>
-          </p:sp>
-          <p:sp>
-            <p:nvSpPr>
-              <p:cNvPr id="57" name="TextBox 56"/>
-              <p:cNvSpPr txBox="1"/>
-              <p:nvPr/>
-            </p:nvSpPr>
-            <p:spPr>
-              <a:xfrm>
-                <a:off x="6421896" y="4869160"/>
-                <a:ext cx="288707" cy="276999"/>
-              </a:xfrm>
-              <a:prstGeom prst="rect">
-                <a:avLst/>
-              </a:prstGeom>
-              <a:noFill/>
-            </p:spPr>
-            <p:txBody>
-              <a:bodyPr wrap="none" rtlCol="0">
-                <a:spAutoFit/>
-              </a:bodyPr>
-              <a:lstStyle/>
-              <a:p>
-                <a:r>
-                  <a:rPr lang="en-US" altLang="zh-CN" sz="1200" dirty="0" smtClean="0"/>
-                  <a:t>RX</a:t>
-                </a:r>
-                <a:endParaRPr lang="zh-CN" altLang="en-US" sz="1200" dirty="0"/>
-              </a:p>
-            </p:txBody>
-          </p:sp>
-        </p:grpSp>
-      </p:grpSp>
+            <a:off x="6009950" y="2183514"/>
+            <a:ext cx="207490" cy="205029"/>
+          </a:xfrm>
+          <a:prstGeom prst="rect">
+            <a:avLst/>
+          </a:prstGeom>
+          <a:solidFill>
+            <a:schemeClr val="bg1"/>
+          </a:solidFill>
+          <a:ln w="12700"/>
+        </p:spPr>
+        <p:style>
+          <a:lnRef idx="2">
+            <a:schemeClr val="accent1">
+              <a:shade val="50000"/>
+            </a:schemeClr>
+          </a:lnRef>
+          <a:fillRef idx="1">
+            <a:schemeClr val="accent1"/>
+          </a:fillRef>
+          <a:effectRef idx="0">
+            <a:schemeClr val="accent1"/>
+          </a:effectRef>
+          <a:fontRef idx="minor">
+            <a:schemeClr val="lt1"/>
+          </a:fontRef>
+        </p:style>
+        <p:txBody>
+          <a:bodyPr rtlCol="0" anchor="ctr"/>
+          <a:lstStyle/>
+          <a:p>
+            <a:pPr algn="ctr"/>
+            <a:endParaRPr lang="zh-CN" altLang="en-US" sz="800" dirty="0"/>
+          </a:p>
+        </p:txBody>
+      </p:sp>
+      <p:sp>
+        <p:nvSpPr>
+          <p:cNvPr id="44" name="矩形 43"/>
+          <p:cNvSpPr/>
+          <p:nvPr/>
+        </p:nvSpPr>
+        <p:spPr>
+          <a:xfrm>
+            <a:off x="6412955" y="2183514"/>
+            <a:ext cx="207490" cy="205029"/>
+          </a:xfrm>
+          <a:prstGeom prst="rect">
+            <a:avLst/>
+          </a:prstGeom>
+          <a:solidFill>
+            <a:schemeClr val="bg1"/>
+          </a:solidFill>
+          <a:ln w="12700"/>
+        </p:spPr>
+        <p:style>
+          <a:lnRef idx="2">
+            <a:schemeClr val="accent1">
+              <a:shade val="50000"/>
+            </a:schemeClr>
+          </a:lnRef>
+          <a:fillRef idx="1">
+            <a:schemeClr val="accent1"/>
+          </a:fillRef>
+          <a:effectRef idx="0">
+            <a:schemeClr val="accent1"/>
+          </a:effectRef>
+          <a:fontRef idx="minor">
+            <a:schemeClr val="lt1"/>
+          </a:fontRef>
+        </p:style>
+        <p:txBody>
+          <a:bodyPr rtlCol="0" anchor="ctr"/>
+          <a:lstStyle/>
+          <a:p>
+            <a:pPr algn="ctr"/>
+            <a:endParaRPr lang="zh-CN" altLang="en-US" sz="800" dirty="0"/>
+          </a:p>
+        </p:txBody>
+      </p:sp>
+      <p:cxnSp>
+        <p:nvCxnSpPr>
+          <p:cNvPr id="33" name="直接连接符 32"/>
+          <p:cNvCxnSpPr>
+            <a:stCxn id="31" idx="3"/>
+            <a:endCxn id="44" idx="1"/>
+          </p:cNvCxnSpPr>
+          <p:nvPr/>
+        </p:nvCxnSpPr>
+        <p:spPr>
+          <a:xfrm>
+            <a:off x="6217439" y="2286028"/>
+            <a:ext cx="195516" cy="0"/>
+          </a:xfrm>
+          <a:prstGeom prst="line">
+            <a:avLst/>
+          </a:prstGeom>
+        </p:spPr>
+        <p:style>
+          <a:lnRef idx="1">
+            <a:schemeClr val="accent1"/>
+          </a:lnRef>
+          <a:fillRef idx="0">
+            <a:schemeClr val="accent1"/>
+          </a:fillRef>
+          <a:effectRef idx="0">
+            <a:schemeClr val="accent1"/>
+          </a:effectRef>
+          <a:fontRef idx="minor">
+            <a:schemeClr val="tx1"/>
+          </a:fontRef>
+        </p:style>
+      </p:cxnSp>
       <p:grpSp>
         <p:nvGrpSpPr>
           <p:cNvPr id="38" name="组合 37"/>
@@ -4846,10 +4449,10 @@
         </p:nvGrpSpPr>
         <p:grpSpPr>
           <a:xfrm>
-            <a:off x="7635953" y="2825933"/>
-            <a:ext cx="593705" cy="260874"/>
+            <a:off x="7872625" y="2482315"/>
+            <a:ext cx="593705" cy="261242"/>
             <a:chOff x="7350247" y="2758068"/>
-            <a:chExt cx="606129" cy="260874"/>
+            <a:chExt cx="606129" cy="261242"/>
           </a:xfrm>
         </p:grpSpPr>
         <p:sp>
@@ -4867,7 +4470,14 @@
               <a:avLst/>
             </a:prstGeom>
             <a:noFill/>
-            <a:ln w="6350"/>
+            <a:ln w="6350">
+              <a:solidFill>
+                <a:schemeClr val="accent3">
+                  <a:lumMod val="40000"/>
+                  <a:lumOff val="60000"/>
+                </a:schemeClr>
+              </a:solidFill>
+            </a:ln>
           </p:spPr>
           <p:style>
             <a:lnRef idx="2">
@@ -4907,7 +4517,7 @@
           <p:spPr>
             <a:xfrm>
               <a:off x="7350247" y="2765394"/>
-              <a:ext cx="452165" cy="246221"/>
+              <a:ext cx="563300" cy="253916"/>
             </a:xfrm>
             <a:prstGeom prst="rect">
               <a:avLst/>
@@ -4921,7 +4531,7 @@
             <a:lstStyle/>
             <a:p>
               <a:r>
-                <a:rPr lang="en-US" altLang="zh-CN" sz="1000" dirty="0" smtClean="0"/>
+                <a:rPr lang="en-US" altLang="zh-CN" sz="1050" dirty="0" smtClean="0"/>
                 <a:t>Queue</a:t>
               </a:r>
               <a:endParaRPr lang="zh-CN" altLang="en-US" sz="1200" dirty="0"/>
@@ -4929,80 +4539,6 @@
           </p:txBody>
         </p:sp>
       </p:grpSp>
-      <p:cxnSp>
-        <p:nvCxnSpPr>
-          <p:cNvPr id="40" name="肘形连接符 39"/>
-          <p:cNvCxnSpPr>
-            <a:stCxn id="28" idx="3"/>
-            <a:endCxn id="58" idx="1"/>
-          </p:cNvCxnSpPr>
-          <p:nvPr/>
-        </p:nvCxnSpPr>
-        <p:spPr>
-          <a:xfrm>
-            <a:off x="7433059" y="2683201"/>
-            <a:ext cx="202894" cy="273169"/>
-          </a:xfrm>
-          <a:prstGeom prst="bentConnector3">
-            <a:avLst>
-              <a:gd name="adj1" fmla="val 50000"/>
-            </a:avLst>
-          </a:prstGeom>
-          <a:ln>
-            <a:tailEnd type="arrow"/>
-          </a:ln>
-        </p:spPr>
-        <p:style>
-          <a:lnRef idx="1">
-            <a:schemeClr val="accent1"/>
-          </a:lnRef>
-          <a:fillRef idx="0">
-            <a:schemeClr val="accent1"/>
-          </a:fillRef>
-          <a:effectRef idx="0">
-            <a:schemeClr val="accent1"/>
-          </a:effectRef>
-          <a:fontRef idx="minor">
-            <a:schemeClr val="tx1"/>
-          </a:fontRef>
-        </p:style>
-      </p:cxnSp>
-      <p:cxnSp>
-        <p:nvCxnSpPr>
-          <p:cNvPr id="49" name="肘形连接符 48"/>
-          <p:cNvCxnSpPr>
-            <a:stCxn id="29" idx="3"/>
-            <a:endCxn id="58" idx="1"/>
-          </p:cNvCxnSpPr>
-          <p:nvPr/>
-        </p:nvCxnSpPr>
-        <p:spPr>
-          <a:xfrm flipV="1">
-            <a:off x="7433059" y="2956370"/>
-            <a:ext cx="202894" cy="196361"/>
-          </a:xfrm>
-          <a:prstGeom prst="bentConnector3">
-            <a:avLst/>
-          </a:prstGeom>
-          <a:ln>
-            <a:tailEnd type="arrow"/>
-          </a:ln>
-        </p:spPr>
-        <p:style>
-          <a:lnRef idx="1">
-            <a:schemeClr val="accent1"/>
-          </a:lnRef>
-          <a:fillRef idx="0">
-            <a:schemeClr val="accent1"/>
-          </a:fillRef>
-          <a:effectRef idx="0">
-            <a:schemeClr val="accent1"/>
-          </a:effectRef>
-          <a:fontRef idx="minor">
-            <a:schemeClr val="tx1"/>
-          </a:fontRef>
-        </p:style>
-      </p:cxnSp>
       <p:sp>
         <p:nvSpPr>
           <p:cNvPr id="68" name="矩形 67"/>
@@ -5011,14 +4547,21 @@
         </p:nvSpPr>
         <p:spPr>
           <a:xfrm>
-            <a:off x="8425011" y="2654130"/>
-            <a:ext cx="915456" cy="604721"/>
+            <a:off x="8661683" y="2420888"/>
+            <a:ext cx="915456" cy="383969"/>
           </a:xfrm>
           <a:prstGeom prst="rect">
             <a:avLst/>
           </a:prstGeom>
           <a:noFill/>
-          <a:ln w="6350"/>
+          <a:ln w="6350">
+            <a:solidFill>
+              <a:schemeClr val="accent3">
+                <a:lumMod val="40000"/>
+                <a:lumOff val="60000"/>
+              </a:schemeClr>
+            </a:solidFill>
+          </a:ln>
         </p:spPr>
         <p:style>
           <a:lnRef idx="2">
@@ -5049,8 +4592,15 @@
                 <a:latin typeface="微软雅黑" panose="020B0503020204020204" pitchFamily="34" charset="-122"/>
                 <a:ea typeface="微软雅黑" panose="020B0503020204020204" pitchFamily="34" charset="-122"/>
               </a:rPr>
-              <a:t>Timer</a:t>
-            </a:r>
+              <a:t>Command</a:t>
+            </a:r>
+            <a:endParaRPr lang="en-US" altLang="zh-CN" sz="1050" dirty="0" smtClean="0">
+              <a:solidFill>
+                <a:schemeClr val="tx1"/>
+              </a:solidFill>
+              <a:latin typeface="微软雅黑" panose="020B0503020204020204" pitchFamily="34" charset="-122"/>
+              <a:ea typeface="微软雅黑" panose="020B0503020204020204" pitchFamily="34" charset="-122"/>
+            </a:endParaRPr>
           </a:p>
           <a:p>
             <a:pPr algn="ctr"/>
@@ -5085,7 +4635,7 @@
         </p:nvCxnSpPr>
         <p:spPr>
           <a:xfrm>
-            <a:off x="8229658" y="2956370"/>
+            <a:off x="8466330" y="2612752"/>
             <a:ext cx="195353" cy="121"/>
           </a:xfrm>
           <a:prstGeom prst="straightConnector1">
@@ -5118,14 +4668,21 @@
         </p:nvSpPr>
         <p:spPr>
           <a:xfrm>
-            <a:off x="6674066" y="3520154"/>
+            <a:off x="6674066" y="3126637"/>
             <a:ext cx="1310023" cy="230355"/>
           </a:xfrm>
           <a:prstGeom prst="rect">
             <a:avLst/>
           </a:prstGeom>
           <a:noFill/>
-          <a:ln w="6350"/>
+          <a:ln w="6350">
+            <a:solidFill>
+              <a:schemeClr val="accent3">
+                <a:lumMod val="40000"/>
+                <a:lumOff val="60000"/>
+              </a:schemeClr>
+            </a:solidFill>
+          </a:ln>
         </p:spPr>
         <p:style>
           <a:lnRef idx="2">
@@ -5149,14 +4706,14 @@
           <a:p>
             <a:pPr algn="ctr"/>
             <a:r>
-              <a:rPr lang="en-US" altLang="zh-CN" sz="1050" dirty="0">
+              <a:rPr lang="en-US" altLang="zh-CN" sz="1050" dirty="0" err="1" smtClean="0">
                 <a:solidFill>
                   <a:schemeClr val="tx1"/>
                 </a:solidFill>
                 <a:latin typeface="微软雅黑" panose="020B0503020204020204" pitchFamily="34" charset="-122"/>
                 <a:ea typeface="微软雅黑" panose="020B0503020204020204" pitchFamily="34" charset="-122"/>
               </a:rPr>
-              <a:t>a</a:t>
+              <a:t>Armbot</a:t>
             </a:r>
             <a:r>
               <a:rPr lang="en-US" altLang="zh-CN" sz="1050" dirty="0" smtClean="0">
@@ -5166,7 +4723,7 @@
                 <a:latin typeface="微软雅黑" panose="020B0503020204020204" pitchFamily="34" charset="-122"/>
                 <a:ea typeface="微软雅黑" panose="020B0503020204020204" pitchFamily="34" charset="-122"/>
               </a:rPr>
-              <a:t>rm-bot-</a:t>
+              <a:t> </a:t>
             </a:r>
             <a:r>
               <a:rPr lang="en-US" altLang="zh-CN" sz="1050" dirty="0" err="1" smtClean="0">
@@ -5176,7 +4733,7 @@
                 <a:latin typeface="微软雅黑" panose="020B0503020204020204" pitchFamily="34" charset="-122"/>
                 <a:ea typeface="微软雅黑" panose="020B0503020204020204" pitchFamily="34" charset="-122"/>
               </a:rPr>
-              <a:t>exeutor</a:t>
+              <a:t>Exeutor</a:t>
             </a:r>
             <a:endParaRPr lang="zh-CN" altLang="en-US" sz="1050" dirty="0">
               <a:solidFill>
@@ -5196,14 +4753,21 @@
         </p:nvSpPr>
         <p:spPr>
           <a:xfrm>
-            <a:off x="8042832" y="3520154"/>
+            <a:off x="8042832" y="3126637"/>
             <a:ext cx="1310023" cy="230355"/>
           </a:xfrm>
           <a:prstGeom prst="rect">
             <a:avLst/>
           </a:prstGeom>
           <a:noFill/>
-          <a:ln w="6350"/>
+          <a:ln w="6350">
+            <a:solidFill>
+              <a:schemeClr val="accent3">
+                <a:lumMod val="40000"/>
+                <a:lumOff val="60000"/>
+              </a:schemeClr>
+            </a:solidFill>
+          </a:ln>
         </p:spPr>
         <p:style>
           <a:lnRef idx="2">
@@ -5234,7 +4798,7 @@
                 <a:latin typeface="微软雅黑" panose="020B0503020204020204" pitchFamily="34" charset="-122"/>
                 <a:ea typeface="微软雅黑" panose="020B0503020204020204" pitchFamily="34" charset="-122"/>
               </a:rPr>
-              <a:t>motor-</a:t>
+              <a:t>Motor </a:t>
             </a:r>
             <a:r>
               <a:rPr lang="en-US" altLang="zh-CN" sz="1050" dirty="0" err="1" smtClean="0">
@@ -5244,7 +4808,7 @@
                 <a:latin typeface="微软雅黑" panose="020B0503020204020204" pitchFamily="34" charset="-122"/>
                 <a:ea typeface="微软雅黑" panose="020B0503020204020204" pitchFamily="34" charset="-122"/>
               </a:rPr>
-              <a:t>exeutor</a:t>
+              <a:t>Exeutor</a:t>
             </a:r>
             <a:endParaRPr lang="zh-CN" altLang="en-US" sz="1050" dirty="0">
               <a:solidFill>
@@ -5267,8 +4831,8 @@
         </p:nvCxnSpPr>
         <p:spPr>
           <a:xfrm rot="5400000">
-            <a:off x="7975258" y="2612672"/>
-            <a:ext cx="261303" cy="1553661"/>
+            <a:off x="8063355" y="2070581"/>
+            <a:ext cx="321780" cy="1790333"/>
           </a:xfrm>
           <a:prstGeom prst="bentConnector3">
             <a:avLst/>
@@ -5303,8 +4867,8 @@
         </p:nvCxnSpPr>
         <p:spPr>
           <a:xfrm rot="5400000">
-            <a:off x="8659641" y="3297055"/>
-            <a:ext cx="261303" cy="184895"/>
+            <a:off x="8747738" y="2754964"/>
+            <a:ext cx="321780" cy="421567"/>
           </a:xfrm>
           <a:prstGeom prst="bentConnector3">
             <a:avLst/>
@@ -5403,8 +4967,8 @@
         </p:nvCxnSpPr>
         <p:spPr>
           <a:xfrm>
-            <a:off x="7329078" y="3750509"/>
-            <a:ext cx="0" cy="140886"/>
+            <a:off x="7329078" y="3356992"/>
+            <a:ext cx="0" cy="534403"/>
           </a:xfrm>
           <a:prstGeom prst="line">
             <a:avLst/>
@@ -5562,15 +5126,15 @@
         <p:nvCxnSpPr>
           <p:cNvPr id="79" name="肘形连接符 78"/>
           <p:cNvCxnSpPr>
-            <a:stCxn id="77" idx="2"/>
+            <a:stCxn id="75" idx="2"/>
             <a:endCxn id="91" idx="0"/>
           </p:cNvCxnSpPr>
           <p:nvPr/>
         </p:nvCxnSpPr>
         <p:spPr>
           <a:xfrm rot="5400000">
-            <a:off x="8307688" y="3567285"/>
-            <a:ext cx="206932" cy="573381"/>
+            <a:off x="8347003" y="3606601"/>
+            <a:ext cx="128300" cy="573380"/>
           </a:xfrm>
           <a:prstGeom prst="bentConnector3">
             <a:avLst/>
@@ -5728,15 +5292,15 @@
         <p:nvCxnSpPr>
           <p:cNvPr id="96" name="肘形连接符 95"/>
           <p:cNvCxnSpPr>
-            <a:stCxn id="77" idx="2"/>
+            <a:stCxn id="75" idx="2"/>
             <a:endCxn id="1045" idx="0"/>
           </p:cNvCxnSpPr>
           <p:nvPr/>
         </p:nvCxnSpPr>
         <p:spPr>
           <a:xfrm rot="5400000">
-            <a:off x="8535161" y="3802770"/>
-            <a:ext cx="214944" cy="110423"/>
+            <a:off x="8574476" y="3842086"/>
+            <a:ext cx="136312" cy="110422"/>
           </a:xfrm>
           <a:prstGeom prst="bentConnector3">
             <a:avLst>
@@ -5768,15 +5332,15 @@
         <p:nvCxnSpPr>
           <p:cNvPr id="99" name="肘形连接符 98"/>
           <p:cNvCxnSpPr>
-            <a:stCxn id="77" idx="2"/>
+            <a:stCxn id="75" idx="2"/>
             <a:endCxn id="95" idx="0"/>
           </p:cNvCxnSpPr>
           <p:nvPr/>
         </p:nvCxnSpPr>
         <p:spPr>
           <a:xfrm rot="16200000" flipH="1">
-            <a:off x="8766861" y="3681492"/>
-            <a:ext cx="206932" cy="344966"/>
+            <a:off x="8806176" y="3720807"/>
+            <a:ext cx="128300" cy="344967"/>
           </a:xfrm>
           <a:prstGeom prst="bentConnector3">
             <a:avLst>
@@ -5808,15 +5372,15 @@
         <p:nvCxnSpPr>
           <p:cNvPr id="102" name="肘形连接符 101"/>
           <p:cNvCxnSpPr>
-            <a:stCxn id="77" idx="2"/>
+            <a:stCxn id="75" idx="2"/>
             <a:endCxn id="94" idx="0"/>
           </p:cNvCxnSpPr>
           <p:nvPr/>
         </p:nvCxnSpPr>
         <p:spPr>
           <a:xfrm rot="16200000" flipH="1">
-            <a:off x="8994334" y="3454019"/>
-            <a:ext cx="214944" cy="807924"/>
+            <a:off x="9033649" y="3493334"/>
+            <a:ext cx="136312" cy="807925"/>
           </a:xfrm>
           <a:prstGeom prst="bentConnector3">
             <a:avLst>
@@ -6076,6 +5640,233 @@
           </a:fontRef>
         </p:style>
       </p:cxnSp>
+      <p:cxnSp>
+        <p:nvCxnSpPr>
+          <p:cNvPr id="4" name="直接箭头连接符 3"/>
+          <p:cNvCxnSpPr>
+            <a:stCxn id="28" idx="3"/>
+            <a:endCxn id="58" idx="1"/>
+          </p:cNvCxnSpPr>
+          <p:nvPr/>
+        </p:nvCxnSpPr>
+        <p:spPr>
+          <a:xfrm>
+            <a:off x="7752796" y="2612873"/>
+            <a:ext cx="119829" cy="3726"/>
+          </a:xfrm>
+          <a:prstGeom prst="straightConnector1">
+            <a:avLst/>
+          </a:prstGeom>
+          <a:ln>
+            <a:tailEnd type="arrow"/>
+          </a:ln>
+        </p:spPr>
+        <p:style>
+          <a:lnRef idx="1">
+            <a:schemeClr val="accent1"/>
+          </a:lnRef>
+          <a:fillRef idx="0">
+            <a:schemeClr val="accent1"/>
+          </a:fillRef>
+          <a:effectRef idx="0">
+            <a:schemeClr val="accent1"/>
+          </a:effectRef>
+          <a:fontRef idx="minor">
+            <a:schemeClr val="tx1"/>
+          </a:fontRef>
+        </p:style>
+      </p:cxnSp>
+      <p:sp>
+        <p:nvSpPr>
+          <p:cNvPr id="75" name="矩形 74"/>
+          <p:cNvSpPr/>
+          <p:nvPr/>
+        </p:nvSpPr>
+        <p:spPr>
+          <a:xfrm>
+            <a:off x="8063056" y="3591127"/>
+            <a:ext cx="1269574" cy="238014"/>
+          </a:xfrm>
+          <a:prstGeom prst="rect">
+            <a:avLst/>
+          </a:prstGeom>
+          <a:noFill/>
+          <a:ln w="12700"/>
+        </p:spPr>
+        <p:style>
+          <a:lnRef idx="2">
+            <a:schemeClr val="accent1">
+              <a:shade val="50000"/>
+            </a:schemeClr>
+          </a:lnRef>
+          <a:fillRef idx="1">
+            <a:schemeClr val="accent1"/>
+          </a:fillRef>
+          <a:effectRef idx="0">
+            <a:schemeClr val="accent1"/>
+          </a:effectRef>
+          <a:fontRef idx="minor">
+            <a:schemeClr val="lt1"/>
+          </a:fontRef>
+        </p:style>
+        <p:txBody>
+          <a:bodyPr rtlCol="0" anchor="ctr"/>
+          <a:lstStyle/>
+          <a:p>
+            <a:pPr algn="ctr"/>
+            <a:r>
+              <a:rPr lang="en-US" altLang="zh-CN" sz="1200" dirty="0">
+                <a:solidFill>
+                  <a:schemeClr val="tx1"/>
+                </a:solidFill>
+                <a:latin typeface="微软雅黑" panose="020B0503020204020204" pitchFamily="34" charset="-122"/>
+                <a:ea typeface="微软雅黑" panose="020B0503020204020204" pitchFamily="34" charset="-122"/>
+              </a:rPr>
+              <a:t>L298N</a:t>
+            </a:r>
+            <a:endParaRPr lang="zh-CN" altLang="en-US" sz="1200" dirty="0">
+              <a:solidFill>
+                <a:schemeClr val="tx1"/>
+              </a:solidFill>
+              <a:latin typeface="微软雅黑" panose="020B0503020204020204" pitchFamily="34" charset="-122"/>
+              <a:ea typeface="微软雅黑" panose="020B0503020204020204" pitchFamily="34" charset="-122"/>
+            </a:endParaRPr>
+          </a:p>
+        </p:txBody>
+      </p:sp>
+      <p:cxnSp>
+        <p:nvCxnSpPr>
+          <p:cNvPr id="47" name="直接连接符 46"/>
+          <p:cNvCxnSpPr>
+            <a:stCxn id="77" idx="2"/>
+            <a:endCxn id="75" idx="0"/>
+          </p:cNvCxnSpPr>
+          <p:nvPr/>
+        </p:nvCxnSpPr>
+        <p:spPr>
+          <a:xfrm flipH="1">
+            <a:off x="8697843" y="3356992"/>
+            <a:ext cx="1" cy="234135"/>
+          </a:xfrm>
+          <a:prstGeom prst="line">
+            <a:avLst/>
+          </a:prstGeom>
+          <a:ln>
+            <a:solidFill>
+              <a:srgbClr val="C00000"/>
+            </a:solidFill>
+          </a:ln>
+        </p:spPr>
+        <p:style>
+          <a:lnRef idx="1">
+            <a:schemeClr val="accent1"/>
+          </a:lnRef>
+          <a:fillRef idx="0">
+            <a:schemeClr val="accent1"/>
+          </a:fillRef>
+          <a:effectRef idx="0">
+            <a:schemeClr val="accent1"/>
+          </a:effectRef>
+          <a:fontRef idx="minor">
+            <a:schemeClr val="tx1"/>
+          </a:fontRef>
+        </p:style>
+      </p:cxnSp>
+      <p:cxnSp>
+        <p:nvCxnSpPr>
+          <p:cNvPr id="59" name="肘形连接符 58"/>
+          <p:cNvCxnSpPr>
+            <a:stCxn id="44" idx="3"/>
+            <a:endCxn id="28" idx="1"/>
+          </p:cNvCxnSpPr>
+          <p:nvPr/>
+        </p:nvCxnSpPr>
+        <p:spPr>
+          <a:xfrm>
+            <a:off x="6620445" y="2286029"/>
+            <a:ext cx="236671" cy="326844"/>
+          </a:xfrm>
+          <a:prstGeom prst="bentConnector3">
+            <a:avLst/>
+          </a:prstGeom>
+          <a:ln>
+            <a:tailEnd type="arrow"/>
+          </a:ln>
+        </p:spPr>
+        <p:style>
+          <a:lnRef idx="1">
+            <a:schemeClr val="accent1"/>
+          </a:lnRef>
+          <a:fillRef idx="0">
+            <a:schemeClr val="accent1"/>
+          </a:fillRef>
+          <a:effectRef idx="0">
+            <a:schemeClr val="accent1"/>
+          </a:effectRef>
+          <a:fontRef idx="minor">
+            <a:schemeClr val="tx1"/>
+          </a:fontRef>
+        </p:style>
+      </p:cxnSp>
+      <p:sp>
+        <p:nvSpPr>
+          <p:cNvPr id="61" name="TextBox 60"/>
+          <p:cNvSpPr txBox="1"/>
+          <p:nvPr/>
+        </p:nvSpPr>
+        <p:spPr>
+          <a:xfrm>
+            <a:off x="834730" y="1533467"/>
+            <a:ext cx="979627" cy="276999"/>
+          </a:xfrm>
+          <a:prstGeom prst="rect">
+            <a:avLst/>
+          </a:prstGeom>
+          <a:noFill/>
+        </p:spPr>
+        <p:txBody>
+          <a:bodyPr wrap="none" rtlCol="0">
+            <a:spAutoFit/>
+          </a:bodyPr>
+          <a:lstStyle/>
+          <a:p>
+            <a:r>
+              <a:rPr lang="en-US" altLang="zh-CN" sz="1200" dirty="0" smtClean="0"/>
+              <a:t>Phone/Pad…</a:t>
+            </a:r>
+            <a:endParaRPr lang="zh-CN" altLang="en-US" sz="1200" dirty="0"/>
+          </a:p>
+        </p:txBody>
+      </p:sp>
+      <p:sp>
+        <p:nvSpPr>
+          <p:cNvPr id="81" name="矩形 80"/>
+          <p:cNvSpPr/>
+          <p:nvPr/>
+        </p:nvSpPr>
+        <p:spPr>
+          <a:xfrm>
+            <a:off x="4286727" y="3309589"/>
+            <a:ext cx="397866" cy="200055"/>
+          </a:xfrm>
+          <a:prstGeom prst="rect">
+            <a:avLst/>
+          </a:prstGeom>
+        </p:spPr>
+        <p:txBody>
+          <a:bodyPr wrap="none">
+            <a:spAutoFit/>
+          </a:bodyPr>
+          <a:lstStyle/>
+          <a:p>
+            <a:r>
+              <a:rPr lang="en-US" altLang="zh-CN" sz="700" dirty="0"/>
+              <a:t>Radar</a:t>
+            </a:r>
+            <a:endParaRPr lang="zh-CN" altLang="en-US" sz="700" dirty="0"/>
+          </a:p>
+        </p:txBody>
+      </p:sp>
     </p:spTree>
     <p:extLst>
       <p:ext uri="{BB962C8B-B14F-4D97-AF65-F5344CB8AC3E}">

--- a/images/arch.pptx
+++ b/images/arch.pptx
@@ -288,7 +288,7 @@
           <a:p>
             <a:fld id="{9E50BDAC-40CF-4CAB-92B6-8882156A02C4}" type="datetimeFigureOut">
               <a:rPr lang="zh-CN" altLang="en-US" smtClean="0"/>
-              <a:t>2026/5/8</a:t>
+              <a:t>2026/5/14</a:t>
             </a:fld>
             <a:endParaRPr lang="zh-CN" altLang="en-US"/>
           </a:p>
@@ -458,7 +458,7 @@
           <a:p>
             <a:fld id="{9E50BDAC-40CF-4CAB-92B6-8882156A02C4}" type="datetimeFigureOut">
               <a:rPr lang="zh-CN" altLang="en-US" smtClean="0"/>
-              <a:t>2026/5/8</a:t>
+              <a:t>2026/5/14</a:t>
             </a:fld>
             <a:endParaRPr lang="zh-CN" altLang="en-US"/>
           </a:p>
@@ -638,7 +638,7 @@
           <a:p>
             <a:fld id="{9E50BDAC-40CF-4CAB-92B6-8882156A02C4}" type="datetimeFigureOut">
               <a:rPr lang="zh-CN" altLang="en-US" smtClean="0"/>
-              <a:t>2026/5/8</a:t>
+              <a:t>2026/5/14</a:t>
             </a:fld>
             <a:endParaRPr lang="zh-CN" altLang="en-US"/>
           </a:p>
@@ -808,7 +808,7 @@
           <a:p>
             <a:fld id="{9E50BDAC-40CF-4CAB-92B6-8882156A02C4}" type="datetimeFigureOut">
               <a:rPr lang="zh-CN" altLang="en-US" smtClean="0"/>
-              <a:t>2026/5/8</a:t>
+              <a:t>2026/5/14</a:t>
             </a:fld>
             <a:endParaRPr lang="zh-CN" altLang="en-US"/>
           </a:p>
@@ -1054,7 +1054,7 @@
           <a:p>
             <a:fld id="{9E50BDAC-40CF-4CAB-92B6-8882156A02C4}" type="datetimeFigureOut">
               <a:rPr lang="zh-CN" altLang="en-US" smtClean="0"/>
-              <a:t>2026/5/8</a:t>
+              <a:t>2026/5/14</a:t>
             </a:fld>
             <a:endParaRPr lang="zh-CN" altLang="en-US"/>
           </a:p>
@@ -1342,7 +1342,7 @@
           <a:p>
             <a:fld id="{9E50BDAC-40CF-4CAB-92B6-8882156A02C4}" type="datetimeFigureOut">
               <a:rPr lang="zh-CN" altLang="en-US" smtClean="0"/>
-              <a:t>2026/5/8</a:t>
+              <a:t>2026/5/14</a:t>
             </a:fld>
             <a:endParaRPr lang="zh-CN" altLang="en-US"/>
           </a:p>
@@ -1764,7 +1764,7 @@
           <a:p>
             <a:fld id="{9E50BDAC-40CF-4CAB-92B6-8882156A02C4}" type="datetimeFigureOut">
               <a:rPr lang="zh-CN" altLang="en-US" smtClean="0"/>
-              <a:t>2026/5/8</a:t>
+              <a:t>2026/5/14</a:t>
             </a:fld>
             <a:endParaRPr lang="zh-CN" altLang="en-US"/>
           </a:p>
@@ -1882,7 +1882,7 @@
           <a:p>
             <a:fld id="{9E50BDAC-40CF-4CAB-92B6-8882156A02C4}" type="datetimeFigureOut">
               <a:rPr lang="zh-CN" altLang="en-US" smtClean="0"/>
-              <a:t>2026/5/8</a:t>
+              <a:t>2026/5/14</a:t>
             </a:fld>
             <a:endParaRPr lang="zh-CN" altLang="en-US"/>
           </a:p>
@@ -1977,7 +1977,7 @@
           <a:p>
             <a:fld id="{9E50BDAC-40CF-4CAB-92B6-8882156A02C4}" type="datetimeFigureOut">
               <a:rPr lang="zh-CN" altLang="en-US" smtClean="0"/>
-              <a:t>2026/5/8</a:t>
+              <a:t>2026/5/14</a:t>
             </a:fld>
             <a:endParaRPr lang="zh-CN" altLang="en-US"/>
           </a:p>
@@ -2254,7 +2254,7 @@
           <a:p>
             <a:fld id="{9E50BDAC-40CF-4CAB-92B6-8882156A02C4}" type="datetimeFigureOut">
               <a:rPr lang="zh-CN" altLang="en-US" smtClean="0"/>
-              <a:t>2026/5/8</a:t>
+              <a:t>2026/5/14</a:t>
             </a:fld>
             <a:endParaRPr lang="zh-CN" altLang="en-US"/>
           </a:p>
@@ -2507,7 +2507,7 @@
           <a:p>
             <a:fld id="{9E50BDAC-40CF-4CAB-92B6-8882156A02C4}" type="datetimeFigureOut">
               <a:rPr lang="zh-CN" altLang="en-US" smtClean="0"/>
-              <a:t>2026/5/8</a:t>
+              <a:t>2026/5/14</a:t>
             </a:fld>
             <a:endParaRPr lang="zh-CN" altLang="en-US"/>
           </a:p>
@@ -2720,7 +2720,7 @@
           <a:p>
             <a:fld id="{9E50BDAC-40CF-4CAB-92B6-8882156A02C4}" type="datetimeFigureOut">
               <a:rPr lang="zh-CN" altLang="en-US" smtClean="0"/>
-              <a:t>2026/5/8</a:t>
+              <a:t>2026/5/14</a:t>
             </a:fld>
             <a:endParaRPr lang="zh-CN" altLang="en-US"/>
           </a:p>
@@ -3095,126 +3095,70 @@
           <a:chExt cx="0" cy="0"/>
         </a:xfrm>
       </p:grpSpPr>
-      <p:grpSp>
-        <p:nvGrpSpPr>
-          <p:cNvPr id="8" name="组合 7"/>
-          <p:cNvGrpSpPr/>
+      <p:pic>
+        <p:nvPicPr>
+          <p:cNvPr id="1029" name="Picture 5"/>
+          <p:cNvPicPr>
+            <a:picLocks noChangeAspect="1" noChangeArrowheads="1"/>
+          </p:cNvPicPr>
           <p:nvPr/>
-        </p:nvGrpSpPr>
-        <p:grpSpPr>
-          <a:xfrm>
-            <a:off x="720156" y="1772816"/>
-            <a:ext cx="2736304" cy="1418169"/>
-            <a:chOff x="971601" y="1990360"/>
-            <a:chExt cx="2817030" cy="1418169"/>
-          </a:xfrm>
-        </p:grpSpPr>
-        <p:pic>
-          <p:nvPicPr>
-            <p:cNvPr id="1029" name="Picture 5"/>
-            <p:cNvPicPr>
-              <a:picLocks noChangeAspect="1" noChangeArrowheads="1"/>
-            </p:cNvPicPr>
-            <p:nvPr/>
-          </p:nvPicPr>
-          <p:blipFill>
-            <a:blip r:embed="rId2" cstate="print">
-              <a:extLst>
-                <a:ext uri="{28A0092B-C50C-407E-A947-70E740481C1C}">
-                  <a14:useLocalDpi xmlns:a14="http://schemas.microsoft.com/office/drawing/2010/main" val="0"/>
-                </a:ext>
-              </a:extLst>
-            </a:blip>
-            <a:srcRect/>
-            <a:stretch>
-              <a:fillRect/>
-            </a:stretch>
-          </p:blipFill>
-          <p:spPr bwMode="auto">
-            <a:xfrm rot="16200000">
-              <a:off x="1671031" y="1290930"/>
-              <a:ext cx="1418169" cy="2817030"/>
-            </a:xfrm>
-            <a:prstGeom prst="rect">
-              <a:avLst/>
-            </a:prstGeom>
-            <a:noFill/>
-            <a:ln>
-              <a:noFill/>
-            </a:ln>
-            <a:effectLst/>
+        </p:nvPicPr>
+        <p:blipFill>
+          <a:blip r:embed="rId2" cstate="print">
             <a:extLst>
-              <a:ext uri="{909E8E84-426E-40DD-AFC4-6F175D3DCCD1}">
-                <a14:hiddenFill xmlns:a14="http://schemas.microsoft.com/office/drawing/2010/main">
-                  <a:solidFill>
-                    <a:schemeClr val="accent1"/>
-                  </a:solidFill>
-                </a14:hiddenFill>
-              </a:ext>
-              <a:ext uri="{91240B29-F687-4F45-9708-019B960494DF}">
-                <a14:hiddenLine xmlns:a14="http://schemas.microsoft.com/office/drawing/2010/main" w="9525">
-                  <a:solidFill>
-                    <a:schemeClr val="tx1"/>
-                  </a:solidFill>
-                  <a:miter lim="800000"/>
-                  <a:headEnd/>
-                  <a:tailEnd/>
-                </a14:hiddenLine>
-              </a:ext>
-              <a:ext uri="{AF507438-7753-43E0-B8FC-AC1667EBCBE1}">
-                <a14:hiddenEffects xmlns:a14="http://schemas.microsoft.com/office/drawing/2010/main">
-                  <a:effectLst>
-                    <a:outerShdw dist="35921" dir="2700000" algn="ctr" rotWithShape="0">
-                      <a:schemeClr val="bg2"/>
-                    </a:outerShdw>
-                  </a:effectLst>
-                </a14:hiddenEffects>
+              <a:ext uri="{28A0092B-C50C-407E-A947-70E740481C1C}">
+                <a14:useLocalDpi xmlns:a14="http://schemas.microsoft.com/office/drawing/2010/main" val="0"/>
               </a:ext>
             </a:extLst>
-          </p:spPr>
-        </p:pic>
-        <p:pic>
-          <p:nvPicPr>
-            <p:cNvPr id="1031" name="Picture 7" descr="宋"/>
-            <p:cNvPicPr>
-              <a:picLocks noChangeAspect="1" noChangeArrowheads="1"/>
-            </p:cNvPicPr>
-            <p:nvPr/>
-          </p:nvPicPr>
-          <p:blipFill>
-            <a:blip r:embed="rId3" cstate="print">
-              <a:extLst>
-                <a:ext uri="{28A0092B-C50C-407E-A947-70E740481C1C}">
-                  <a14:useLocalDpi xmlns:a14="http://schemas.microsoft.com/office/drawing/2010/main" val="0"/>
-                </a:ext>
-              </a:extLst>
-            </a:blip>
-            <a:srcRect/>
-            <a:stretch>
-              <a:fillRect/>
-            </a:stretch>
-          </p:blipFill>
-          <p:spPr bwMode="auto">
-            <a:xfrm>
-              <a:off x="1263991" y="2149910"/>
-              <a:ext cx="2232248" cy="1116124"/>
-            </a:xfrm>
-            <a:prstGeom prst="rect">
-              <a:avLst/>
-            </a:prstGeom>
+          </a:blip>
+          <a:srcRect/>
+          <a:stretch>
+            <a:fillRect/>
+          </a:stretch>
+        </p:blipFill>
+        <p:spPr bwMode="auto">
+          <a:xfrm rot="16200000">
+            <a:off x="1379223" y="1113749"/>
+            <a:ext cx="1418169" cy="2736304"/>
+          </a:xfrm>
+          <a:prstGeom prst="rect">
+            <a:avLst/>
+          </a:prstGeom>
+          <a:noFill/>
+          <a:ln>
             <a:noFill/>
-            <a:extLst>
-              <a:ext uri="{909E8E84-426E-40DD-AFC4-6F175D3DCCD1}">
-                <a14:hiddenFill xmlns:a14="http://schemas.microsoft.com/office/drawing/2010/main">
-                  <a:solidFill>
-                    <a:srgbClr val="FFFFFF"/>
-                  </a:solidFill>
-                </a14:hiddenFill>
-              </a:ext>
-            </a:extLst>
-          </p:spPr>
-        </p:pic>
-      </p:grpSp>
+          </a:ln>
+          <a:effectLst/>
+          <a:extLst>
+            <a:ext uri="{909E8E84-426E-40DD-AFC4-6F175D3DCCD1}">
+              <a14:hiddenFill xmlns:a14="http://schemas.microsoft.com/office/drawing/2010/main">
+                <a:solidFill>
+                  <a:schemeClr val="accent1"/>
+                </a:solidFill>
+              </a14:hiddenFill>
+            </a:ext>
+            <a:ext uri="{91240B29-F687-4F45-9708-019B960494DF}">
+              <a14:hiddenLine xmlns:a14="http://schemas.microsoft.com/office/drawing/2010/main" w="9525">
+                <a:solidFill>
+                  <a:schemeClr val="tx1"/>
+                </a:solidFill>
+                <a:miter lim="800000"/>
+                <a:headEnd/>
+                <a:tailEnd/>
+              </a14:hiddenLine>
+            </a:ext>
+            <a:ext uri="{AF507438-7753-43E0-B8FC-AC1667EBCBE1}">
+              <a14:hiddenEffects xmlns:a14="http://schemas.microsoft.com/office/drawing/2010/main">
+                <a:effectLst>
+                  <a:outerShdw dist="35921" dir="2700000" algn="ctr" rotWithShape="0">
+                    <a:schemeClr val="bg2"/>
+                  </a:outerShdw>
+                </a:effectLst>
+              </a14:hiddenEffects>
+            </a:ext>
+          </a:extLst>
+        </p:spPr>
+      </p:pic>
       <p:sp>
         <p:nvSpPr>
           <p:cNvPr id="6" name="AutoShape 9" descr="说话素材 - Canva可画"/>
@@ -3296,6 +3240,70 @@
       <p:pic>
         <p:nvPicPr>
           <p:cNvPr id="1036" name="Picture 12"/>
+          <p:cNvPicPr>
+            <a:picLocks noChangeAspect="1" noChangeArrowheads="1"/>
+          </p:cNvPicPr>
+          <p:nvPr/>
+        </p:nvPicPr>
+        <p:blipFill>
+          <a:blip r:embed="rId3">
+            <a:extLst>
+              <a:ext uri="{28A0092B-C50C-407E-A947-70E740481C1C}">
+                <a14:useLocalDpi xmlns:a14="http://schemas.microsoft.com/office/drawing/2010/main" val="0"/>
+              </a:ext>
+            </a:extLst>
+          </a:blip>
+          <a:srcRect/>
+          <a:stretch>
+            <a:fillRect/>
+          </a:stretch>
+        </p:blipFill>
+        <p:spPr bwMode="auto">
+          <a:xfrm flipH="1">
+            <a:off x="40078" y="1859613"/>
+            <a:ext cx="608069" cy="985072"/>
+          </a:xfrm>
+          <a:prstGeom prst="rect">
+            <a:avLst/>
+          </a:prstGeom>
+          <a:noFill/>
+          <a:ln>
+            <a:noFill/>
+          </a:ln>
+          <a:effectLst/>
+          <a:extLst>
+            <a:ext uri="{909E8E84-426E-40DD-AFC4-6F175D3DCCD1}">
+              <a14:hiddenFill xmlns:a14="http://schemas.microsoft.com/office/drawing/2010/main">
+                <a:solidFill>
+                  <a:schemeClr val="accent1"/>
+                </a:solidFill>
+              </a14:hiddenFill>
+            </a:ext>
+            <a:ext uri="{91240B29-F687-4F45-9708-019B960494DF}">
+              <a14:hiddenLine xmlns:a14="http://schemas.microsoft.com/office/drawing/2010/main" w="9525">
+                <a:solidFill>
+                  <a:schemeClr val="tx1"/>
+                </a:solidFill>
+                <a:miter lim="800000"/>
+                <a:headEnd/>
+                <a:tailEnd/>
+              </a14:hiddenLine>
+            </a:ext>
+            <a:ext uri="{AF507438-7753-43E0-B8FC-AC1667EBCBE1}">
+              <a14:hiddenEffects xmlns:a14="http://schemas.microsoft.com/office/drawing/2010/main">
+                <a:effectLst>
+                  <a:outerShdw dist="35921" dir="2700000" algn="ctr" rotWithShape="0">
+                    <a:schemeClr val="bg2"/>
+                  </a:outerShdw>
+                </a:effectLst>
+              </a14:hiddenEffects>
+            </a:ext>
+          </a:extLst>
+        </p:spPr>
+      </p:pic>
+      <p:pic>
+        <p:nvPicPr>
+          <p:cNvPr id="1037" name="Picture 13"/>
           <p:cNvPicPr>
             <a:picLocks noChangeAspect="1" noChangeArrowheads="1"/>
           </p:cNvPicPr>
@@ -3315,9 +3323,9 @@
           </a:stretch>
         </p:blipFill>
         <p:spPr bwMode="auto">
-          <a:xfrm flipH="1">
-            <a:off x="40078" y="1859613"/>
-            <a:ext cx="608069" cy="985072"/>
+          <a:xfrm>
+            <a:off x="1230512" y="3190986"/>
+            <a:ext cx="583845" cy="864096"/>
           </a:xfrm>
           <a:prstGeom prst="rect">
             <a:avLst/>
@@ -3359,14 +3367,14 @@
       </p:pic>
       <p:pic>
         <p:nvPicPr>
-          <p:cNvPr id="1037" name="Picture 13"/>
+          <p:cNvPr id="1038" name="Picture 14"/>
           <p:cNvPicPr>
             <a:picLocks noChangeAspect="1" noChangeArrowheads="1"/>
           </p:cNvPicPr>
           <p:nvPr/>
         </p:nvPicPr>
         <p:blipFill>
-          <a:blip r:embed="rId5">
+          <a:blip r:embed="rId5" cstate="print">
             <a:extLst>
               <a:ext uri="{28A0092B-C50C-407E-A947-70E740481C1C}">
                 <a14:useLocalDpi xmlns:a14="http://schemas.microsoft.com/office/drawing/2010/main" val="0"/>
@@ -3379,9 +3387,9 @@
           </a:stretch>
         </p:blipFill>
         <p:spPr bwMode="auto">
-          <a:xfrm>
-            <a:off x="1230512" y="3190986"/>
-            <a:ext cx="583845" cy="864096"/>
+          <a:xfrm rot="5400000">
+            <a:off x="3708153" y="2266657"/>
+            <a:ext cx="418582" cy="460971"/>
           </a:xfrm>
           <a:prstGeom prst="rect">
             <a:avLst/>
@@ -3421,9 +3429,122 @@
           </a:extLst>
         </p:spPr>
       </p:pic>
+      <p:sp>
+        <p:nvSpPr>
+          <p:cNvPr id="9" name="矩形 8"/>
+          <p:cNvSpPr/>
+          <p:nvPr/>
+        </p:nvSpPr>
+        <p:spPr>
+          <a:xfrm>
+            <a:off x="4420928" y="1336625"/>
+            <a:ext cx="5444244" cy="2786322"/>
+          </a:xfrm>
+          <a:prstGeom prst="rect">
+            <a:avLst/>
+          </a:prstGeom>
+          <a:noFill/>
+        </p:spPr>
+        <p:style>
+          <a:lnRef idx="2">
+            <a:schemeClr val="accent1">
+              <a:shade val="50000"/>
+            </a:schemeClr>
+          </a:lnRef>
+          <a:fillRef idx="1">
+            <a:schemeClr val="accent1"/>
+          </a:fillRef>
+          <a:effectRef idx="0">
+            <a:schemeClr val="accent1"/>
+          </a:effectRef>
+          <a:fontRef idx="minor">
+            <a:schemeClr val="lt1"/>
+          </a:fontRef>
+        </p:style>
+        <p:txBody>
+          <a:bodyPr rtlCol="0" anchor="t"/>
+          <a:lstStyle/>
+          <a:p>
+            <a:r>
+              <a:rPr lang="en-US" altLang="zh-CN" dirty="0">
+                <a:solidFill>
+                  <a:schemeClr val="tx1"/>
+                </a:solidFill>
+                <a:latin typeface="微软雅黑" panose="020B0503020204020204" pitchFamily="34" charset="-122"/>
+                <a:ea typeface="微软雅黑" panose="020B0503020204020204" pitchFamily="34" charset="-122"/>
+              </a:rPr>
+              <a:t>In-vehicle System</a:t>
+            </a:r>
+            <a:endParaRPr lang="zh-CN" altLang="en-US" dirty="0">
+              <a:solidFill>
+                <a:schemeClr val="tx1"/>
+              </a:solidFill>
+              <a:latin typeface="微软雅黑" panose="020B0503020204020204" pitchFamily="34" charset="-122"/>
+              <a:ea typeface="微软雅黑" panose="020B0503020204020204" pitchFamily="34" charset="-122"/>
+            </a:endParaRPr>
+          </a:p>
+        </p:txBody>
+      </p:sp>
+      <p:sp>
+        <p:nvSpPr>
+          <p:cNvPr id="15" name="矩形 14"/>
+          <p:cNvSpPr/>
+          <p:nvPr/>
+        </p:nvSpPr>
+        <p:spPr>
+          <a:xfrm>
+            <a:off x="4570205" y="1927477"/>
+            <a:ext cx="1543490" cy="1857420"/>
+          </a:xfrm>
+          <a:prstGeom prst="rect">
+            <a:avLst/>
+          </a:prstGeom>
+          <a:noFill/>
+          <a:ln w="12700"/>
+        </p:spPr>
+        <p:style>
+          <a:lnRef idx="2">
+            <a:schemeClr val="accent1">
+              <a:shade val="50000"/>
+            </a:schemeClr>
+          </a:lnRef>
+          <a:fillRef idx="1">
+            <a:schemeClr val="accent1"/>
+          </a:fillRef>
+          <a:effectRef idx="0">
+            <a:schemeClr val="accent1"/>
+          </a:effectRef>
+          <a:fontRef idx="minor">
+            <a:schemeClr val="lt1"/>
+          </a:fontRef>
+        </p:style>
+        <p:txBody>
+          <a:bodyPr rtlCol="0" anchor="t"/>
+          <a:lstStyle/>
+          <a:p>
+            <a:r>
+              <a:rPr lang="en-US" altLang="zh-CN" sz="1200" dirty="0" smtClean="0">
+                <a:solidFill>
+                  <a:schemeClr val="tx1"/>
+                </a:solidFill>
+                <a:latin typeface="微软雅黑" panose="020B0503020204020204" pitchFamily="34" charset="-122"/>
+                <a:ea typeface="微软雅黑" panose="020B0503020204020204" pitchFamily="34" charset="-122"/>
+              </a:rPr>
+              <a:t>ESP32-S3-CAM</a:t>
+            </a:r>
+            <a:endParaRPr lang="zh-CN" altLang="en-US" sz="1200" dirty="0">
+              <a:solidFill>
+                <a:schemeClr val="tx1"/>
+              </a:solidFill>
+              <a:latin typeface="微软雅黑" panose="020B0503020204020204" pitchFamily="34" charset="-122"/>
+              <a:ea typeface="微软雅黑" panose="020B0503020204020204" pitchFamily="34" charset="-122"/>
+            </a:endParaRPr>
+          </a:p>
+        </p:txBody>
+      </p:sp>
       <p:pic>
         <p:nvPicPr>
-          <p:cNvPr id="1038" name="Picture 14"/>
+          <p:cNvPr id="1039" name="Picture 15"/>
           <p:cNvPicPr>
             <a:picLocks noChangeAspect="1" noChangeArrowheads="1"/>
           </p:cNvPicPr>
@@ -3443,9 +3564,9 @@
           </a:stretch>
         </p:blipFill>
         <p:spPr bwMode="auto">
-          <a:xfrm rot="5400000">
-            <a:off x="3708153" y="2266657"/>
-            <a:ext cx="418582" cy="460971"/>
+          <a:xfrm>
+            <a:off x="4707162" y="2225731"/>
+            <a:ext cx="493723" cy="407038"/>
           </a:xfrm>
           <a:prstGeom prst="rect">
             <a:avLst/>
@@ -3487,19 +3608,27 @@
       </p:pic>
       <p:sp>
         <p:nvSpPr>
-          <p:cNvPr id="9" name="矩形 8"/>
+          <p:cNvPr id="17" name="矩形 16"/>
           <p:cNvSpPr/>
           <p:nvPr/>
         </p:nvSpPr>
         <p:spPr>
           <a:xfrm>
-            <a:off x="4420928" y="1336625"/>
-            <a:ext cx="5444244" cy="2786322"/>
+            <a:off x="4707162" y="2848793"/>
+            <a:ext cx="1269574" cy="238014"/>
           </a:xfrm>
           <a:prstGeom prst="rect">
             <a:avLst/>
           </a:prstGeom>
           <a:noFill/>
+          <a:ln w="6350">
+            <a:solidFill>
+              <a:schemeClr val="accent3">
+                <a:lumMod val="40000"/>
+                <a:lumOff val="60000"/>
+              </a:schemeClr>
+            </a:solidFill>
+          </a:ln>
         </p:spPr>
         <p:style>
           <a:lnRef idx="2">
@@ -3518,20 +3647,21 @@
           </a:fontRef>
         </p:style>
         <p:txBody>
-          <a:bodyPr rtlCol="0" anchor="t"/>
-          <a:lstStyle/>
-          <a:p>
-            <a:r>
-              <a:rPr lang="en-US" altLang="zh-CN" dirty="0">
+          <a:bodyPr rtlCol="0" anchor="ctr"/>
+          <a:lstStyle/>
+          <a:p>
+            <a:pPr algn="ctr"/>
+            <a:r>
+              <a:rPr lang="en-US" altLang="zh-CN" sz="1100" dirty="0" smtClean="0">
                 <a:solidFill>
                   <a:schemeClr val="tx1"/>
                 </a:solidFill>
                 <a:latin typeface="微软雅黑" panose="020B0503020204020204" pitchFamily="34" charset="-122"/>
                 <a:ea typeface="微软雅黑" panose="020B0503020204020204" pitchFamily="34" charset="-122"/>
               </a:rPr>
-              <a:t>In-vehicle System</a:t>
-            </a:r>
-            <a:endParaRPr lang="zh-CN" altLang="en-US" dirty="0">
+              <a:t>Ps2 web server</a:t>
+            </a:r>
+            <a:endParaRPr lang="zh-CN" altLang="en-US" sz="1100" dirty="0">
               <a:solidFill>
                 <a:schemeClr val="tx1"/>
               </a:solidFill>
@@ -3543,20 +3673,27 @@
       </p:sp>
       <p:sp>
         <p:nvSpPr>
-          <p:cNvPr id="15" name="矩形 14"/>
+          <p:cNvPr id="18" name="矩形 17"/>
           <p:cNvSpPr/>
           <p:nvPr/>
         </p:nvSpPr>
         <p:spPr>
           <a:xfrm>
-            <a:off x="4570205" y="1927477"/>
-            <a:ext cx="1543490" cy="1857420"/>
+            <a:off x="4707162" y="3139844"/>
+            <a:ext cx="1269574" cy="238014"/>
           </a:xfrm>
           <a:prstGeom prst="rect">
             <a:avLst/>
           </a:prstGeom>
           <a:noFill/>
-          <a:ln w="12700"/>
+          <a:ln w="6350">
+            <a:solidFill>
+              <a:schemeClr val="accent3">
+                <a:lumMod val="40000"/>
+                <a:lumOff val="60000"/>
+              </a:schemeClr>
+            </a:solidFill>
+          </a:ln>
         </p:spPr>
         <p:style>
           <a:lnRef idx="2">
@@ -3575,18 +3712,76 @@
           </a:fontRef>
         </p:style>
         <p:txBody>
-          <a:bodyPr rtlCol="0" anchor="t"/>
-          <a:lstStyle/>
-          <a:p>
-            <a:r>
-              <a:rPr lang="en-US" altLang="zh-CN" sz="1200" dirty="0" smtClean="0">
+          <a:bodyPr rtlCol="0" anchor="ctr"/>
+          <a:lstStyle/>
+          <a:p>
+            <a:pPr algn="ctr"/>
+            <a:r>
+              <a:rPr lang="en-US" altLang="zh-CN" sz="1100" dirty="0" smtClean="0">
                 <a:solidFill>
                   <a:schemeClr val="tx1"/>
                 </a:solidFill>
                 <a:latin typeface="微软雅黑" panose="020B0503020204020204" pitchFamily="34" charset="-122"/>
                 <a:ea typeface="微软雅黑" panose="020B0503020204020204" pitchFamily="34" charset="-122"/>
               </a:rPr>
-              <a:t>ESP32-S3-CAM</a:t>
+              <a:t>VLA Infer</a:t>
+            </a:r>
+            <a:endParaRPr lang="zh-CN" altLang="en-US" sz="1100" dirty="0">
+              <a:solidFill>
+                <a:schemeClr val="tx1"/>
+              </a:solidFill>
+              <a:latin typeface="微软雅黑" panose="020B0503020204020204" pitchFamily="34" charset="-122"/>
+              <a:ea typeface="微软雅黑" panose="020B0503020204020204" pitchFamily="34" charset="-122"/>
+            </a:endParaRPr>
+          </a:p>
+        </p:txBody>
+      </p:sp>
+      <p:sp>
+        <p:nvSpPr>
+          <p:cNvPr id="19" name="矩形 18"/>
+          <p:cNvSpPr/>
+          <p:nvPr/>
+        </p:nvSpPr>
+        <p:spPr>
+          <a:xfrm>
+            <a:off x="6536886" y="1927477"/>
+            <a:ext cx="3172389" cy="1563837"/>
+          </a:xfrm>
+          <a:prstGeom prst="rect">
+            <a:avLst/>
+          </a:prstGeom>
+          <a:noFill/>
+          <a:ln w="12700"/>
+        </p:spPr>
+        <p:style>
+          <a:lnRef idx="2">
+            <a:schemeClr val="accent1">
+              <a:shade val="50000"/>
+            </a:schemeClr>
+          </a:lnRef>
+          <a:fillRef idx="1">
+            <a:schemeClr val="accent1"/>
+          </a:fillRef>
+          <a:effectRef idx="0">
+            <a:schemeClr val="accent1"/>
+          </a:effectRef>
+          <a:fontRef idx="minor">
+            <a:schemeClr val="lt1"/>
+          </a:fontRef>
+        </p:style>
+        <p:txBody>
+          <a:bodyPr rtlCol="0" anchor="t"/>
+          <a:lstStyle/>
+          <a:p>
+            <a:r>
+              <a:rPr lang="en-US" altLang="zh-CN" sz="1200" dirty="0" smtClean="0">
+                <a:solidFill>
+                  <a:schemeClr val="tx1"/>
+                </a:solidFill>
+                <a:latin typeface="微软雅黑" panose="020B0503020204020204" pitchFamily="34" charset="-122"/>
+                <a:ea typeface="微软雅黑" panose="020B0503020204020204" pitchFamily="34" charset="-122"/>
+              </a:rPr>
+              <a:t>STM32F103C8T6</a:t>
             </a:r>
             <a:endParaRPr lang="zh-CN" altLang="en-US" sz="1200" dirty="0">
               <a:solidFill>
@@ -3598,9 +3793,74 @@
           </a:p>
         </p:txBody>
       </p:sp>
+      <p:sp>
+        <p:nvSpPr>
+          <p:cNvPr id="20" name="矩形 19"/>
+          <p:cNvSpPr/>
+          <p:nvPr/>
+        </p:nvSpPr>
+        <p:spPr>
+          <a:xfrm>
+            <a:off x="4707162" y="3438764"/>
+            <a:ext cx="1269574" cy="238014"/>
+          </a:xfrm>
+          <a:prstGeom prst="rect">
+            <a:avLst/>
+          </a:prstGeom>
+          <a:noFill/>
+          <a:ln w="6350">
+            <a:solidFill>
+              <a:schemeClr val="accent3">
+                <a:lumMod val="40000"/>
+                <a:lumOff val="60000"/>
+              </a:schemeClr>
+            </a:solidFill>
+          </a:ln>
+        </p:spPr>
+        <p:style>
+          <a:lnRef idx="2">
+            <a:schemeClr val="accent1">
+              <a:shade val="50000"/>
+            </a:schemeClr>
+          </a:lnRef>
+          <a:fillRef idx="1">
+            <a:schemeClr val="accent1"/>
+          </a:fillRef>
+          <a:effectRef idx="0">
+            <a:schemeClr val="accent1"/>
+          </a:effectRef>
+          <a:fontRef idx="minor">
+            <a:schemeClr val="lt1"/>
+          </a:fontRef>
+        </p:style>
+        <p:txBody>
+          <a:bodyPr rtlCol="0" anchor="ctr"/>
+          <a:lstStyle/>
+          <a:p>
+            <a:pPr algn="ctr"/>
+            <a:r>
+              <a:rPr lang="en-US" altLang="zh-CN" sz="1100" dirty="0" smtClean="0">
+                <a:solidFill>
+                  <a:schemeClr val="tx1"/>
+                </a:solidFill>
+                <a:latin typeface="微软雅黑" panose="020B0503020204020204" pitchFamily="34" charset="-122"/>
+                <a:ea typeface="微软雅黑" panose="020B0503020204020204" pitchFamily="34" charset="-122"/>
+              </a:rPr>
+              <a:t>Sensor Receiver</a:t>
+            </a:r>
+            <a:endParaRPr lang="zh-CN" altLang="en-US" sz="1100" dirty="0">
+              <a:solidFill>
+                <a:schemeClr val="tx1"/>
+              </a:solidFill>
+              <a:latin typeface="微软雅黑" panose="020B0503020204020204" pitchFamily="34" charset="-122"/>
+              <a:ea typeface="微软雅黑" panose="020B0503020204020204" pitchFamily="34" charset="-122"/>
+            </a:endParaRPr>
+          </a:p>
+        </p:txBody>
+      </p:sp>
       <p:pic>
         <p:nvPicPr>
-          <p:cNvPr id="1039" name="Picture 15"/>
+          <p:cNvPr id="1040" name="Picture 16"/>
           <p:cNvPicPr>
             <a:picLocks noChangeAspect="1" noChangeArrowheads="1"/>
           </p:cNvPicPr>
@@ -3621,8 +3881,8 @@
         </p:blipFill>
         <p:spPr bwMode="auto">
           <a:xfrm>
-            <a:off x="4707162" y="2225731"/>
-            <a:ext cx="493723" cy="407038"/>
+            <a:off x="4261917" y="3712889"/>
+            <a:ext cx="447490" cy="357012"/>
           </a:xfrm>
           <a:prstGeom prst="rect">
             <a:avLst/>
@@ -3662,268 +3922,54 @@
           </a:extLst>
         </p:spPr>
       </p:pic>
-      <p:sp>
-        <p:nvSpPr>
-          <p:cNvPr id="17" name="矩形 16"/>
-          <p:cNvSpPr/>
+      <p:cxnSp>
+        <p:nvCxnSpPr>
+          <p:cNvPr id="11" name="肘形连接符 10"/>
+          <p:cNvCxnSpPr>
+            <a:stCxn id="1040" idx="0"/>
+            <a:endCxn id="20" idx="1"/>
+          </p:cNvCxnSpPr>
           <p:nvPr/>
-        </p:nvSpPr>
+        </p:nvCxnSpPr>
         <p:spPr>
-          <a:xfrm>
-            <a:off x="4707162" y="2848793"/>
-            <a:ext cx="1269574" cy="238014"/>
-          </a:xfrm>
-          <a:prstGeom prst="rect">
+          <a:xfrm rot="5400000" flipH="1" flipV="1">
+            <a:off x="4518852" y="3524581"/>
+            <a:ext cx="155118" cy="221502"/>
+          </a:xfrm>
+          <a:prstGeom prst="bentConnector2">
             <a:avLst/>
           </a:prstGeom>
-          <a:noFill/>
-          <a:ln w="6350">
+          <a:ln>
             <a:solidFill>
-              <a:schemeClr val="accent3">
-                <a:lumMod val="40000"/>
-                <a:lumOff val="60000"/>
-              </a:schemeClr>
+              <a:srgbClr val="C00000"/>
             </a:solidFill>
           </a:ln>
         </p:spPr>
         <p:style>
-          <a:lnRef idx="2">
-            <a:schemeClr val="accent1">
-              <a:shade val="50000"/>
-            </a:schemeClr>
+          <a:lnRef idx="1">
+            <a:schemeClr val="accent1"/>
           </a:lnRef>
-          <a:fillRef idx="1">
+          <a:fillRef idx="0">
             <a:schemeClr val="accent1"/>
           </a:fillRef>
           <a:effectRef idx="0">
             <a:schemeClr val="accent1"/>
           </a:effectRef>
           <a:fontRef idx="minor">
-            <a:schemeClr val="lt1"/>
+            <a:schemeClr val="tx1"/>
           </a:fontRef>
         </p:style>
-        <p:txBody>
-          <a:bodyPr rtlCol="0" anchor="ctr"/>
-          <a:lstStyle/>
-          <a:p>
-            <a:pPr algn="ctr"/>
-            <a:r>
-              <a:rPr lang="en-US" altLang="zh-CN" sz="1100" dirty="0" smtClean="0">
-                <a:solidFill>
-                  <a:schemeClr val="tx1"/>
-                </a:solidFill>
-                <a:latin typeface="微软雅黑" panose="020B0503020204020204" pitchFamily="34" charset="-122"/>
-                <a:ea typeface="微软雅黑" panose="020B0503020204020204" pitchFamily="34" charset="-122"/>
-              </a:rPr>
-              <a:t>Ps2 web server</a:t>
-            </a:r>
-            <a:endParaRPr lang="zh-CN" altLang="en-US" sz="1100" dirty="0">
-              <a:solidFill>
-                <a:schemeClr val="tx1"/>
-              </a:solidFill>
-              <a:latin typeface="微软雅黑" panose="020B0503020204020204" pitchFamily="34" charset="-122"/>
-              <a:ea typeface="微软雅黑" panose="020B0503020204020204" pitchFamily="34" charset="-122"/>
-            </a:endParaRPr>
-          </a:p>
-        </p:txBody>
-      </p:sp>
-      <p:sp>
-        <p:nvSpPr>
-          <p:cNvPr id="18" name="矩形 17"/>
-          <p:cNvSpPr/>
-          <p:nvPr/>
-        </p:nvSpPr>
-        <p:spPr>
-          <a:xfrm>
-            <a:off x="4707162" y="3139844"/>
-            <a:ext cx="1269574" cy="238014"/>
-          </a:xfrm>
-          <a:prstGeom prst="rect">
-            <a:avLst/>
-          </a:prstGeom>
-          <a:noFill/>
-          <a:ln w="6350">
-            <a:solidFill>
-              <a:schemeClr val="accent3">
-                <a:lumMod val="40000"/>
-                <a:lumOff val="60000"/>
-              </a:schemeClr>
-            </a:solidFill>
-          </a:ln>
-        </p:spPr>
-        <p:style>
-          <a:lnRef idx="2">
-            <a:schemeClr val="accent1">
-              <a:shade val="50000"/>
-            </a:schemeClr>
-          </a:lnRef>
-          <a:fillRef idx="1">
-            <a:schemeClr val="accent1"/>
-          </a:fillRef>
-          <a:effectRef idx="0">
-            <a:schemeClr val="accent1"/>
-          </a:effectRef>
-          <a:fontRef idx="minor">
-            <a:schemeClr val="lt1"/>
-          </a:fontRef>
-        </p:style>
-        <p:txBody>
-          <a:bodyPr rtlCol="0" anchor="ctr"/>
-          <a:lstStyle/>
-          <a:p>
-            <a:pPr algn="ctr"/>
-            <a:r>
-              <a:rPr lang="en-US" altLang="zh-CN" sz="1100" dirty="0" smtClean="0">
-                <a:solidFill>
-                  <a:schemeClr val="tx1"/>
-                </a:solidFill>
-                <a:latin typeface="微软雅黑" panose="020B0503020204020204" pitchFamily="34" charset="-122"/>
-                <a:ea typeface="微软雅黑" panose="020B0503020204020204" pitchFamily="34" charset="-122"/>
-              </a:rPr>
-              <a:t>VLA Infer</a:t>
-            </a:r>
-            <a:endParaRPr lang="zh-CN" altLang="en-US" sz="1100" dirty="0">
-              <a:solidFill>
-                <a:schemeClr val="tx1"/>
-              </a:solidFill>
-              <a:latin typeface="微软雅黑" panose="020B0503020204020204" pitchFamily="34" charset="-122"/>
-              <a:ea typeface="微软雅黑" panose="020B0503020204020204" pitchFamily="34" charset="-122"/>
-            </a:endParaRPr>
-          </a:p>
-        </p:txBody>
-      </p:sp>
-      <p:sp>
-        <p:nvSpPr>
-          <p:cNvPr id="19" name="矩形 18"/>
-          <p:cNvSpPr/>
-          <p:nvPr/>
-        </p:nvSpPr>
-        <p:spPr>
-          <a:xfrm>
-            <a:off x="6536886" y="1927477"/>
-            <a:ext cx="3172389" cy="1563837"/>
-          </a:xfrm>
-          <a:prstGeom prst="rect">
-            <a:avLst/>
-          </a:prstGeom>
-          <a:noFill/>
-          <a:ln w="12700"/>
-        </p:spPr>
-        <p:style>
-          <a:lnRef idx="2">
-            <a:schemeClr val="accent1">
-              <a:shade val="50000"/>
-            </a:schemeClr>
-          </a:lnRef>
-          <a:fillRef idx="1">
-            <a:schemeClr val="accent1"/>
-          </a:fillRef>
-          <a:effectRef idx="0">
-            <a:schemeClr val="accent1"/>
-          </a:effectRef>
-          <a:fontRef idx="minor">
-            <a:schemeClr val="lt1"/>
-          </a:fontRef>
-        </p:style>
-        <p:txBody>
-          <a:bodyPr rtlCol="0" anchor="t"/>
-          <a:lstStyle/>
-          <a:p>
-            <a:r>
-              <a:rPr lang="en-US" altLang="zh-CN" sz="1200" dirty="0" smtClean="0">
-                <a:solidFill>
-                  <a:schemeClr val="tx1"/>
-                </a:solidFill>
-                <a:latin typeface="微软雅黑" panose="020B0503020204020204" pitchFamily="34" charset="-122"/>
-                <a:ea typeface="微软雅黑" panose="020B0503020204020204" pitchFamily="34" charset="-122"/>
-              </a:rPr>
-              <a:t>STM32F103C8T6</a:t>
-            </a:r>
-            <a:endParaRPr lang="zh-CN" altLang="en-US" sz="1200" dirty="0">
-              <a:solidFill>
-                <a:schemeClr val="tx1"/>
-              </a:solidFill>
-              <a:latin typeface="微软雅黑" panose="020B0503020204020204" pitchFamily="34" charset="-122"/>
-              <a:ea typeface="微软雅黑" panose="020B0503020204020204" pitchFamily="34" charset="-122"/>
-            </a:endParaRPr>
-          </a:p>
-        </p:txBody>
-      </p:sp>
-      <p:sp>
-        <p:nvSpPr>
-          <p:cNvPr id="20" name="矩形 19"/>
-          <p:cNvSpPr/>
-          <p:nvPr/>
-        </p:nvSpPr>
-        <p:spPr>
-          <a:xfrm>
-            <a:off x="4707162" y="3438764"/>
-            <a:ext cx="1269574" cy="238014"/>
-          </a:xfrm>
-          <a:prstGeom prst="rect">
-            <a:avLst/>
-          </a:prstGeom>
-          <a:noFill/>
-          <a:ln w="6350">
-            <a:solidFill>
-              <a:schemeClr val="accent3">
-                <a:lumMod val="40000"/>
-                <a:lumOff val="60000"/>
-              </a:schemeClr>
-            </a:solidFill>
-          </a:ln>
-        </p:spPr>
-        <p:style>
-          <a:lnRef idx="2">
-            <a:schemeClr val="accent1">
-              <a:shade val="50000"/>
-            </a:schemeClr>
-          </a:lnRef>
-          <a:fillRef idx="1">
-            <a:schemeClr val="accent1"/>
-          </a:fillRef>
-          <a:effectRef idx="0">
-            <a:schemeClr val="accent1"/>
-          </a:effectRef>
-          <a:fontRef idx="minor">
-            <a:schemeClr val="lt1"/>
-          </a:fontRef>
-        </p:style>
-        <p:txBody>
-          <a:bodyPr rtlCol="0" anchor="ctr"/>
-          <a:lstStyle/>
-          <a:p>
-            <a:pPr algn="ctr"/>
-            <a:r>
-              <a:rPr lang="en-US" altLang="zh-CN" sz="1100" dirty="0" smtClean="0">
-                <a:solidFill>
-                  <a:schemeClr val="tx1"/>
-                </a:solidFill>
-                <a:latin typeface="微软雅黑" panose="020B0503020204020204" pitchFamily="34" charset="-122"/>
-                <a:ea typeface="微软雅黑" panose="020B0503020204020204" pitchFamily="34" charset="-122"/>
-              </a:rPr>
-              <a:t>Sensor Receiver</a:t>
-            </a:r>
-            <a:endParaRPr lang="zh-CN" altLang="en-US" sz="1100" dirty="0">
-              <a:solidFill>
-                <a:schemeClr val="tx1"/>
-              </a:solidFill>
-              <a:latin typeface="微软雅黑" panose="020B0503020204020204" pitchFamily="34" charset="-122"/>
-              <a:ea typeface="微软雅黑" panose="020B0503020204020204" pitchFamily="34" charset="-122"/>
-            </a:endParaRPr>
-          </a:p>
-        </p:txBody>
-      </p:sp>
+      </p:cxnSp>
       <p:pic>
         <p:nvPicPr>
-          <p:cNvPr id="1040" name="Picture 16"/>
+          <p:cNvPr id="1041" name="Picture 17"/>
           <p:cNvPicPr>
             <a:picLocks noChangeAspect="1" noChangeArrowheads="1"/>
           </p:cNvPicPr>
           <p:nvPr/>
         </p:nvPicPr>
         <p:blipFill>
-          <a:blip r:embed="rId8" cstate="print">
+          <a:blip r:embed="rId8">
             <a:extLst>
               <a:ext uri="{28A0092B-C50C-407E-A947-70E740481C1C}">
                 <a14:useLocalDpi xmlns:a14="http://schemas.microsoft.com/office/drawing/2010/main" val="0"/>
@@ -3937,8 +3983,8 @@
         </p:blipFill>
         <p:spPr bwMode="auto">
           <a:xfrm>
-            <a:off x="4261917" y="3712889"/>
-            <a:ext cx="447490" cy="357012"/>
+            <a:off x="5478908" y="2225730"/>
+            <a:ext cx="448531" cy="407039"/>
           </a:xfrm>
           <a:prstGeom prst="rect">
             <a:avLst/>
@@ -3978,108 +4024,6 @@
           </a:extLst>
         </p:spPr>
       </p:pic>
-      <p:cxnSp>
-        <p:nvCxnSpPr>
-          <p:cNvPr id="11" name="肘形连接符 10"/>
-          <p:cNvCxnSpPr>
-            <a:stCxn id="1040" idx="0"/>
-            <a:endCxn id="20" idx="1"/>
-          </p:cNvCxnSpPr>
-          <p:nvPr/>
-        </p:nvCxnSpPr>
-        <p:spPr>
-          <a:xfrm rot="5400000" flipH="1" flipV="1">
-            <a:off x="4518852" y="3524581"/>
-            <a:ext cx="155118" cy="221502"/>
-          </a:xfrm>
-          <a:prstGeom prst="bentConnector2">
-            <a:avLst/>
-          </a:prstGeom>
-          <a:ln>
-            <a:solidFill>
-              <a:srgbClr val="C00000"/>
-            </a:solidFill>
-          </a:ln>
-        </p:spPr>
-        <p:style>
-          <a:lnRef idx="1">
-            <a:schemeClr val="accent1"/>
-          </a:lnRef>
-          <a:fillRef idx="0">
-            <a:schemeClr val="accent1"/>
-          </a:fillRef>
-          <a:effectRef idx="0">
-            <a:schemeClr val="accent1"/>
-          </a:effectRef>
-          <a:fontRef idx="minor">
-            <a:schemeClr val="tx1"/>
-          </a:fontRef>
-        </p:style>
-      </p:cxnSp>
-      <p:pic>
-        <p:nvPicPr>
-          <p:cNvPr id="1041" name="Picture 17"/>
-          <p:cNvPicPr>
-            <a:picLocks noChangeAspect="1" noChangeArrowheads="1"/>
-          </p:cNvPicPr>
-          <p:nvPr/>
-        </p:nvPicPr>
-        <p:blipFill>
-          <a:blip r:embed="rId9">
-            <a:extLst>
-              <a:ext uri="{28A0092B-C50C-407E-A947-70E740481C1C}">
-                <a14:useLocalDpi xmlns:a14="http://schemas.microsoft.com/office/drawing/2010/main" val="0"/>
-              </a:ext>
-            </a:extLst>
-          </a:blip>
-          <a:srcRect/>
-          <a:stretch>
-            <a:fillRect/>
-          </a:stretch>
-        </p:blipFill>
-        <p:spPr bwMode="auto">
-          <a:xfrm>
-            <a:off x="5478908" y="2225730"/>
-            <a:ext cx="448531" cy="407039"/>
-          </a:xfrm>
-          <a:prstGeom prst="rect">
-            <a:avLst/>
-          </a:prstGeom>
-          <a:noFill/>
-          <a:ln>
-            <a:noFill/>
-          </a:ln>
-          <a:effectLst/>
-          <a:extLst>
-            <a:ext uri="{909E8E84-426E-40DD-AFC4-6F175D3DCCD1}">
-              <a14:hiddenFill xmlns:a14="http://schemas.microsoft.com/office/drawing/2010/main">
-                <a:solidFill>
-                  <a:schemeClr val="accent1"/>
-                </a:solidFill>
-              </a14:hiddenFill>
-            </a:ext>
-            <a:ext uri="{91240B29-F687-4F45-9708-019B960494DF}">
-              <a14:hiddenLine xmlns:a14="http://schemas.microsoft.com/office/drawing/2010/main" w="9525">
-                <a:solidFill>
-                  <a:schemeClr val="tx1"/>
-                </a:solidFill>
-                <a:miter lim="800000"/>
-                <a:headEnd/>
-                <a:tailEnd/>
-              </a14:hiddenLine>
-            </a:ext>
-            <a:ext uri="{AF507438-7753-43E0-B8FC-AC1667EBCBE1}">
-              <a14:hiddenEffects xmlns:a14="http://schemas.microsoft.com/office/drawing/2010/main">
-                <a:effectLst>
-                  <a:outerShdw dist="35921" dir="2700000" algn="ctr" rotWithShape="0">
-                    <a:schemeClr val="bg2"/>
-                  </a:outerShdw>
-                </a:effectLst>
-              </a14:hiddenEffects>
-            </a:ext>
-          </a:extLst>
-        </p:spPr>
-      </p:pic>
       <p:sp>
         <p:nvSpPr>
           <p:cNvPr id="13" name="TextBox 12"/>
@@ -4227,7 +4171,7 @@
           <p:nvPr/>
         </p:nvPicPr>
         <p:blipFill>
-          <a:blip r:embed="rId10" cstate="print">
+          <a:blip r:embed="rId9" cstate="print">
             <a:extLst>
               <a:ext uri="{28A0092B-C50C-407E-A947-70E740481C1C}">
                 <a14:useLocalDpi xmlns:a14="http://schemas.microsoft.com/office/drawing/2010/main" val="0"/>
@@ -4594,13 +4538,6 @@
               </a:rPr>
               <a:t>Command</a:t>
             </a:r>
-            <a:endParaRPr lang="en-US" altLang="zh-CN" sz="1050" dirty="0" smtClean="0">
-              <a:solidFill>
-                <a:schemeClr val="tx1"/>
-              </a:solidFill>
-              <a:latin typeface="微软雅黑" panose="020B0503020204020204" pitchFamily="34" charset="-122"/>
-              <a:ea typeface="微软雅黑" panose="020B0503020204020204" pitchFamily="34" charset="-122"/>
-            </a:endParaRPr>
           </a:p>
           <a:p>
             <a:pPr algn="ctr"/>
@@ -4901,7 +4838,7 @@
           <p:nvPr/>
         </p:nvPicPr>
         <p:blipFill>
-          <a:blip r:embed="rId11" cstate="print">
+          <a:blip r:embed="rId10" cstate="print">
             <a:extLst>
               <a:ext uri="{28A0092B-C50C-407E-A947-70E740481C1C}">
                 <a14:useLocalDpi xmlns:a14="http://schemas.microsoft.com/office/drawing/2010/main" val="0"/>
@@ -4997,6 +4934,420 @@
       <p:pic>
         <p:nvPicPr>
           <p:cNvPr id="1045" name="Picture 21"/>
+          <p:cNvPicPr>
+            <a:picLocks noChangeAspect="1" noChangeArrowheads="1"/>
+          </p:cNvPicPr>
+          <p:nvPr/>
+        </p:nvPicPr>
+        <p:blipFill>
+          <a:blip r:embed="rId11" cstate="print">
+            <a:extLst>
+              <a:ext uri="{28A0092B-C50C-407E-A947-70E740481C1C}">
+                <a14:useLocalDpi xmlns:a14="http://schemas.microsoft.com/office/drawing/2010/main" val="0"/>
+              </a:ext>
+            </a:extLst>
+          </a:blip>
+          <a:srcRect/>
+          <a:stretch>
+            <a:fillRect/>
+          </a:stretch>
+        </p:blipFill>
+        <p:spPr bwMode="auto">
+          <a:xfrm>
+            <a:off x="8383913" y="3965453"/>
+            <a:ext cx="407015" cy="411711"/>
+          </a:xfrm>
+          <a:prstGeom prst="rect">
+            <a:avLst/>
+          </a:prstGeom>
+          <a:noFill/>
+          <a:ln>
+            <a:noFill/>
+          </a:ln>
+          <a:effectLst/>
+          <a:extLst>
+            <a:ext uri="{909E8E84-426E-40DD-AFC4-6F175D3DCCD1}">
+              <a14:hiddenFill xmlns:a14="http://schemas.microsoft.com/office/drawing/2010/main">
+                <a:solidFill>
+                  <a:schemeClr val="accent1"/>
+                </a:solidFill>
+              </a14:hiddenFill>
+            </a:ext>
+            <a:ext uri="{91240B29-F687-4F45-9708-019B960494DF}">
+              <a14:hiddenLine xmlns:a14="http://schemas.microsoft.com/office/drawing/2010/main" w="9525">
+                <a:solidFill>
+                  <a:schemeClr val="tx1"/>
+                </a:solidFill>
+                <a:miter lim="800000"/>
+                <a:headEnd/>
+                <a:tailEnd/>
+              </a14:hiddenLine>
+            </a:ext>
+            <a:ext uri="{AF507438-7753-43E0-B8FC-AC1667EBCBE1}">
+              <a14:hiddenEffects xmlns:a14="http://schemas.microsoft.com/office/drawing/2010/main">
+                <a:effectLst>
+                  <a:outerShdw dist="35921" dir="2700000" algn="ctr" rotWithShape="0">
+                    <a:schemeClr val="bg2"/>
+                  </a:outerShdw>
+                </a:effectLst>
+              </a14:hiddenEffects>
+            </a:ext>
+          </a:extLst>
+        </p:spPr>
+      </p:pic>
+      <p:pic>
+        <p:nvPicPr>
+          <p:cNvPr id="91" name="Picture 21"/>
+          <p:cNvPicPr>
+            <a:picLocks noChangeAspect="1" noChangeArrowheads="1"/>
+          </p:cNvPicPr>
+          <p:nvPr/>
+        </p:nvPicPr>
+        <p:blipFill>
+          <a:blip r:embed="rId11" cstate="print">
+            <a:extLst>
+              <a:ext uri="{28A0092B-C50C-407E-A947-70E740481C1C}">
+                <a14:useLocalDpi xmlns:a14="http://schemas.microsoft.com/office/drawing/2010/main" val="0"/>
+              </a:ext>
+            </a:extLst>
+          </a:blip>
+          <a:srcRect/>
+          <a:stretch>
+            <a:fillRect/>
+          </a:stretch>
+        </p:blipFill>
+        <p:spPr bwMode="auto">
+          <a:xfrm>
+            <a:off x="7920955" y="3957441"/>
+            <a:ext cx="407015" cy="411711"/>
+          </a:xfrm>
+          <a:prstGeom prst="rect">
+            <a:avLst/>
+          </a:prstGeom>
+          <a:noFill/>
+          <a:ln>
+            <a:noFill/>
+          </a:ln>
+          <a:effectLst/>
+          <a:extLst>
+            <a:ext uri="{909E8E84-426E-40DD-AFC4-6F175D3DCCD1}">
+              <a14:hiddenFill xmlns:a14="http://schemas.microsoft.com/office/drawing/2010/main">
+                <a:solidFill>
+                  <a:schemeClr val="accent1"/>
+                </a:solidFill>
+              </a14:hiddenFill>
+            </a:ext>
+            <a:ext uri="{91240B29-F687-4F45-9708-019B960494DF}">
+              <a14:hiddenLine xmlns:a14="http://schemas.microsoft.com/office/drawing/2010/main" w="9525">
+                <a:solidFill>
+                  <a:schemeClr val="tx1"/>
+                </a:solidFill>
+                <a:miter lim="800000"/>
+                <a:headEnd/>
+                <a:tailEnd/>
+              </a14:hiddenLine>
+            </a:ext>
+            <a:ext uri="{AF507438-7753-43E0-B8FC-AC1667EBCBE1}">
+              <a14:hiddenEffects xmlns:a14="http://schemas.microsoft.com/office/drawing/2010/main">
+                <a:effectLst>
+                  <a:outerShdw dist="35921" dir="2700000" algn="ctr" rotWithShape="0">
+                    <a:schemeClr val="bg2"/>
+                  </a:outerShdw>
+                </a:effectLst>
+              </a14:hiddenEffects>
+            </a:ext>
+          </a:extLst>
+        </p:spPr>
+      </p:pic>
+      <p:cxnSp>
+        <p:nvCxnSpPr>
+          <p:cNvPr id="79" name="肘形连接符 78"/>
+          <p:cNvCxnSpPr>
+            <a:stCxn id="75" idx="2"/>
+            <a:endCxn id="91" idx="0"/>
+          </p:cNvCxnSpPr>
+          <p:nvPr/>
+        </p:nvCxnSpPr>
+        <p:spPr>
+          <a:xfrm rot="5400000">
+            <a:off x="8347003" y="3606601"/>
+            <a:ext cx="128300" cy="573380"/>
+          </a:xfrm>
+          <a:prstGeom prst="bentConnector3">
+            <a:avLst/>
+          </a:prstGeom>
+          <a:ln>
+            <a:solidFill>
+              <a:srgbClr val="C00000"/>
+            </a:solidFill>
+          </a:ln>
+        </p:spPr>
+        <p:style>
+          <a:lnRef idx="1">
+            <a:schemeClr val="accent1"/>
+          </a:lnRef>
+          <a:fillRef idx="0">
+            <a:schemeClr val="accent1"/>
+          </a:fillRef>
+          <a:effectRef idx="0">
+            <a:schemeClr val="accent1"/>
+          </a:effectRef>
+          <a:fontRef idx="minor">
+            <a:schemeClr val="tx1"/>
+          </a:fontRef>
+        </p:style>
+      </p:cxnSp>
+      <p:pic>
+        <p:nvPicPr>
+          <p:cNvPr id="94" name="Picture 21"/>
+          <p:cNvPicPr>
+            <a:picLocks noChangeAspect="1" noChangeArrowheads="1"/>
+          </p:cNvPicPr>
+          <p:nvPr/>
+        </p:nvPicPr>
+        <p:blipFill>
+          <a:blip r:embed="rId11" cstate="print">
+            <a:extLst>
+              <a:ext uri="{28A0092B-C50C-407E-A947-70E740481C1C}">
+                <a14:useLocalDpi xmlns:a14="http://schemas.microsoft.com/office/drawing/2010/main" val="0"/>
+              </a:ext>
+            </a:extLst>
+          </a:blip>
+          <a:srcRect/>
+          <a:stretch>
+            <a:fillRect/>
+          </a:stretch>
+        </p:blipFill>
+        <p:spPr bwMode="auto">
+          <a:xfrm>
+            <a:off x="9302260" y="3965453"/>
+            <a:ext cx="407015" cy="411711"/>
+          </a:xfrm>
+          <a:prstGeom prst="rect">
+            <a:avLst/>
+          </a:prstGeom>
+          <a:noFill/>
+          <a:ln>
+            <a:noFill/>
+          </a:ln>
+          <a:effectLst/>
+          <a:extLst>
+            <a:ext uri="{909E8E84-426E-40DD-AFC4-6F175D3DCCD1}">
+              <a14:hiddenFill xmlns:a14="http://schemas.microsoft.com/office/drawing/2010/main">
+                <a:solidFill>
+                  <a:schemeClr val="accent1"/>
+                </a:solidFill>
+              </a14:hiddenFill>
+            </a:ext>
+            <a:ext uri="{91240B29-F687-4F45-9708-019B960494DF}">
+              <a14:hiddenLine xmlns:a14="http://schemas.microsoft.com/office/drawing/2010/main" w="9525">
+                <a:solidFill>
+                  <a:schemeClr val="tx1"/>
+                </a:solidFill>
+                <a:miter lim="800000"/>
+                <a:headEnd/>
+                <a:tailEnd/>
+              </a14:hiddenLine>
+            </a:ext>
+            <a:ext uri="{AF507438-7753-43E0-B8FC-AC1667EBCBE1}">
+              <a14:hiddenEffects xmlns:a14="http://schemas.microsoft.com/office/drawing/2010/main">
+                <a:effectLst>
+                  <a:outerShdw dist="35921" dir="2700000" algn="ctr" rotWithShape="0">
+                    <a:schemeClr val="bg2"/>
+                  </a:outerShdw>
+                </a:effectLst>
+              </a14:hiddenEffects>
+            </a:ext>
+          </a:extLst>
+        </p:spPr>
+      </p:pic>
+      <p:pic>
+        <p:nvPicPr>
+          <p:cNvPr id="95" name="Picture 21"/>
+          <p:cNvPicPr>
+            <a:picLocks noChangeAspect="1" noChangeArrowheads="1"/>
+          </p:cNvPicPr>
+          <p:nvPr/>
+        </p:nvPicPr>
+        <p:blipFill>
+          <a:blip r:embed="rId11" cstate="print">
+            <a:extLst>
+              <a:ext uri="{28A0092B-C50C-407E-A947-70E740481C1C}">
+                <a14:useLocalDpi xmlns:a14="http://schemas.microsoft.com/office/drawing/2010/main" val="0"/>
+              </a:ext>
+            </a:extLst>
+          </a:blip>
+          <a:srcRect/>
+          <a:stretch>
+            <a:fillRect/>
+          </a:stretch>
+        </p:blipFill>
+        <p:spPr bwMode="auto">
+          <a:xfrm>
+            <a:off x="8839302" y="3957441"/>
+            <a:ext cx="407015" cy="411711"/>
+          </a:xfrm>
+          <a:prstGeom prst="rect">
+            <a:avLst/>
+          </a:prstGeom>
+          <a:noFill/>
+          <a:ln>
+            <a:noFill/>
+          </a:ln>
+          <a:effectLst/>
+          <a:extLst>
+            <a:ext uri="{909E8E84-426E-40DD-AFC4-6F175D3DCCD1}">
+              <a14:hiddenFill xmlns:a14="http://schemas.microsoft.com/office/drawing/2010/main">
+                <a:solidFill>
+                  <a:schemeClr val="accent1"/>
+                </a:solidFill>
+              </a14:hiddenFill>
+            </a:ext>
+            <a:ext uri="{91240B29-F687-4F45-9708-019B960494DF}">
+              <a14:hiddenLine xmlns:a14="http://schemas.microsoft.com/office/drawing/2010/main" w="9525">
+                <a:solidFill>
+                  <a:schemeClr val="tx1"/>
+                </a:solidFill>
+                <a:miter lim="800000"/>
+                <a:headEnd/>
+                <a:tailEnd/>
+              </a14:hiddenLine>
+            </a:ext>
+            <a:ext uri="{AF507438-7753-43E0-B8FC-AC1667EBCBE1}">
+              <a14:hiddenEffects xmlns:a14="http://schemas.microsoft.com/office/drawing/2010/main">
+                <a:effectLst>
+                  <a:outerShdw dist="35921" dir="2700000" algn="ctr" rotWithShape="0">
+                    <a:schemeClr val="bg2"/>
+                  </a:outerShdw>
+                </a:effectLst>
+              </a14:hiddenEffects>
+            </a:ext>
+          </a:extLst>
+        </p:spPr>
+      </p:pic>
+      <p:cxnSp>
+        <p:nvCxnSpPr>
+          <p:cNvPr id="96" name="肘形连接符 95"/>
+          <p:cNvCxnSpPr>
+            <a:stCxn id="75" idx="2"/>
+            <a:endCxn id="1045" idx="0"/>
+          </p:cNvCxnSpPr>
+          <p:nvPr/>
+        </p:nvCxnSpPr>
+        <p:spPr>
+          <a:xfrm rot="5400000">
+            <a:off x="8574476" y="3842086"/>
+            <a:ext cx="136312" cy="110422"/>
+          </a:xfrm>
+          <a:prstGeom prst="bentConnector3">
+            <a:avLst>
+              <a:gd name="adj1" fmla="val 50000"/>
+            </a:avLst>
+          </a:prstGeom>
+          <a:ln>
+            <a:solidFill>
+              <a:srgbClr val="C00000"/>
+            </a:solidFill>
+          </a:ln>
+        </p:spPr>
+        <p:style>
+          <a:lnRef idx="1">
+            <a:schemeClr val="accent1"/>
+          </a:lnRef>
+          <a:fillRef idx="0">
+            <a:schemeClr val="accent1"/>
+          </a:fillRef>
+          <a:effectRef idx="0">
+            <a:schemeClr val="accent1"/>
+          </a:effectRef>
+          <a:fontRef idx="minor">
+            <a:schemeClr val="tx1"/>
+          </a:fontRef>
+        </p:style>
+      </p:cxnSp>
+      <p:cxnSp>
+        <p:nvCxnSpPr>
+          <p:cNvPr id="99" name="肘形连接符 98"/>
+          <p:cNvCxnSpPr>
+            <a:stCxn id="75" idx="2"/>
+            <a:endCxn id="95" idx="0"/>
+          </p:cNvCxnSpPr>
+          <p:nvPr/>
+        </p:nvCxnSpPr>
+        <p:spPr>
+          <a:xfrm rot="16200000" flipH="1">
+            <a:off x="8806176" y="3720807"/>
+            <a:ext cx="128300" cy="344967"/>
+          </a:xfrm>
+          <a:prstGeom prst="bentConnector3">
+            <a:avLst>
+              <a:gd name="adj1" fmla="val 50000"/>
+            </a:avLst>
+          </a:prstGeom>
+          <a:ln>
+            <a:solidFill>
+              <a:srgbClr val="C00000"/>
+            </a:solidFill>
+          </a:ln>
+        </p:spPr>
+        <p:style>
+          <a:lnRef idx="1">
+            <a:schemeClr val="accent1"/>
+          </a:lnRef>
+          <a:fillRef idx="0">
+            <a:schemeClr val="accent1"/>
+          </a:fillRef>
+          <a:effectRef idx="0">
+            <a:schemeClr val="accent1"/>
+          </a:effectRef>
+          <a:fontRef idx="minor">
+            <a:schemeClr val="tx1"/>
+          </a:fontRef>
+        </p:style>
+      </p:cxnSp>
+      <p:cxnSp>
+        <p:nvCxnSpPr>
+          <p:cNvPr id="102" name="肘形连接符 101"/>
+          <p:cNvCxnSpPr>
+            <a:stCxn id="75" idx="2"/>
+            <a:endCxn id="94" idx="0"/>
+          </p:cNvCxnSpPr>
+          <p:nvPr/>
+        </p:nvCxnSpPr>
+        <p:spPr>
+          <a:xfrm rot="16200000" flipH="1">
+            <a:off x="9033649" y="3493334"/>
+            <a:ext cx="136312" cy="807925"/>
+          </a:xfrm>
+          <a:prstGeom prst="bentConnector3">
+            <a:avLst>
+              <a:gd name="adj1" fmla="val 50000"/>
+            </a:avLst>
+          </a:prstGeom>
+          <a:ln>
+            <a:solidFill>
+              <a:srgbClr val="C00000"/>
+            </a:solidFill>
+          </a:ln>
+        </p:spPr>
+        <p:style>
+          <a:lnRef idx="1">
+            <a:schemeClr val="accent1"/>
+          </a:lnRef>
+          <a:fillRef idx="0">
+            <a:schemeClr val="accent1"/>
+          </a:fillRef>
+          <a:effectRef idx="0">
+            <a:schemeClr val="accent1"/>
+          </a:effectRef>
+          <a:fontRef idx="minor">
+            <a:schemeClr val="tx1"/>
+          </a:fontRef>
+        </p:style>
+      </p:cxnSp>
+      <p:pic>
+        <p:nvPicPr>
+          <p:cNvPr id="1046" name="Picture 22"/>
           <p:cNvPicPr>
             <a:picLocks noChangeAspect="1" noChangeArrowheads="1"/>
           </p:cNvPicPr>
@@ -5017,420 +5368,6 @@
         </p:blipFill>
         <p:spPr bwMode="auto">
           <a:xfrm>
-            <a:off x="8383913" y="3965453"/>
-            <a:ext cx="407015" cy="411711"/>
-          </a:xfrm>
-          <a:prstGeom prst="rect">
-            <a:avLst/>
-          </a:prstGeom>
-          <a:noFill/>
-          <a:ln>
-            <a:noFill/>
-          </a:ln>
-          <a:effectLst/>
-          <a:extLst>
-            <a:ext uri="{909E8E84-426E-40DD-AFC4-6F175D3DCCD1}">
-              <a14:hiddenFill xmlns:a14="http://schemas.microsoft.com/office/drawing/2010/main">
-                <a:solidFill>
-                  <a:schemeClr val="accent1"/>
-                </a:solidFill>
-              </a14:hiddenFill>
-            </a:ext>
-            <a:ext uri="{91240B29-F687-4F45-9708-019B960494DF}">
-              <a14:hiddenLine xmlns:a14="http://schemas.microsoft.com/office/drawing/2010/main" w="9525">
-                <a:solidFill>
-                  <a:schemeClr val="tx1"/>
-                </a:solidFill>
-                <a:miter lim="800000"/>
-                <a:headEnd/>
-                <a:tailEnd/>
-              </a14:hiddenLine>
-            </a:ext>
-            <a:ext uri="{AF507438-7753-43E0-B8FC-AC1667EBCBE1}">
-              <a14:hiddenEffects xmlns:a14="http://schemas.microsoft.com/office/drawing/2010/main">
-                <a:effectLst>
-                  <a:outerShdw dist="35921" dir="2700000" algn="ctr" rotWithShape="0">
-                    <a:schemeClr val="bg2"/>
-                  </a:outerShdw>
-                </a:effectLst>
-              </a14:hiddenEffects>
-            </a:ext>
-          </a:extLst>
-        </p:spPr>
-      </p:pic>
-      <p:pic>
-        <p:nvPicPr>
-          <p:cNvPr id="91" name="Picture 21"/>
-          <p:cNvPicPr>
-            <a:picLocks noChangeAspect="1" noChangeArrowheads="1"/>
-          </p:cNvPicPr>
-          <p:nvPr/>
-        </p:nvPicPr>
-        <p:blipFill>
-          <a:blip r:embed="rId12" cstate="print">
-            <a:extLst>
-              <a:ext uri="{28A0092B-C50C-407E-A947-70E740481C1C}">
-                <a14:useLocalDpi xmlns:a14="http://schemas.microsoft.com/office/drawing/2010/main" val="0"/>
-              </a:ext>
-            </a:extLst>
-          </a:blip>
-          <a:srcRect/>
-          <a:stretch>
-            <a:fillRect/>
-          </a:stretch>
-        </p:blipFill>
-        <p:spPr bwMode="auto">
-          <a:xfrm>
-            <a:off x="7920955" y="3957441"/>
-            <a:ext cx="407015" cy="411711"/>
-          </a:xfrm>
-          <a:prstGeom prst="rect">
-            <a:avLst/>
-          </a:prstGeom>
-          <a:noFill/>
-          <a:ln>
-            <a:noFill/>
-          </a:ln>
-          <a:effectLst/>
-          <a:extLst>
-            <a:ext uri="{909E8E84-426E-40DD-AFC4-6F175D3DCCD1}">
-              <a14:hiddenFill xmlns:a14="http://schemas.microsoft.com/office/drawing/2010/main">
-                <a:solidFill>
-                  <a:schemeClr val="accent1"/>
-                </a:solidFill>
-              </a14:hiddenFill>
-            </a:ext>
-            <a:ext uri="{91240B29-F687-4F45-9708-019B960494DF}">
-              <a14:hiddenLine xmlns:a14="http://schemas.microsoft.com/office/drawing/2010/main" w="9525">
-                <a:solidFill>
-                  <a:schemeClr val="tx1"/>
-                </a:solidFill>
-                <a:miter lim="800000"/>
-                <a:headEnd/>
-                <a:tailEnd/>
-              </a14:hiddenLine>
-            </a:ext>
-            <a:ext uri="{AF507438-7753-43E0-B8FC-AC1667EBCBE1}">
-              <a14:hiddenEffects xmlns:a14="http://schemas.microsoft.com/office/drawing/2010/main">
-                <a:effectLst>
-                  <a:outerShdw dist="35921" dir="2700000" algn="ctr" rotWithShape="0">
-                    <a:schemeClr val="bg2"/>
-                  </a:outerShdw>
-                </a:effectLst>
-              </a14:hiddenEffects>
-            </a:ext>
-          </a:extLst>
-        </p:spPr>
-      </p:pic>
-      <p:cxnSp>
-        <p:nvCxnSpPr>
-          <p:cNvPr id="79" name="肘形连接符 78"/>
-          <p:cNvCxnSpPr>
-            <a:stCxn id="75" idx="2"/>
-            <a:endCxn id="91" idx="0"/>
-          </p:cNvCxnSpPr>
-          <p:nvPr/>
-        </p:nvCxnSpPr>
-        <p:spPr>
-          <a:xfrm rot="5400000">
-            <a:off x="8347003" y="3606601"/>
-            <a:ext cx="128300" cy="573380"/>
-          </a:xfrm>
-          <a:prstGeom prst="bentConnector3">
-            <a:avLst/>
-          </a:prstGeom>
-          <a:ln>
-            <a:solidFill>
-              <a:srgbClr val="C00000"/>
-            </a:solidFill>
-          </a:ln>
-        </p:spPr>
-        <p:style>
-          <a:lnRef idx="1">
-            <a:schemeClr val="accent1"/>
-          </a:lnRef>
-          <a:fillRef idx="0">
-            <a:schemeClr val="accent1"/>
-          </a:fillRef>
-          <a:effectRef idx="0">
-            <a:schemeClr val="accent1"/>
-          </a:effectRef>
-          <a:fontRef idx="minor">
-            <a:schemeClr val="tx1"/>
-          </a:fontRef>
-        </p:style>
-      </p:cxnSp>
-      <p:pic>
-        <p:nvPicPr>
-          <p:cNvPr id="94" name="Picture 21"/>
-          <p:cNvPicPr>
-            <a:picLocks noChangeAspect="1" noChangeArrowheads="1"/>
-          </p:cNvPicPr>
-          <p:nvPr/>
-        </p:nvPicPr>
-        <p:blipFill>
-          <a:blip r:embed="rId12" cstate="print">
-            <a:extLst>
-              <a:ext uri="{28A0092B-C50C-407E-A947-70E740481C1C}">
-                <a14:useLocalDpi xmlns:a14="http://schemas.microsoft.com/office/drawing/2010/main" val="0"/>
-              </a:ext>
-            </a:extLst>
-          </a:blip>
-          <a:srcRect/>
-          <a:stretch>
-            <a:fillRect/>
-          </a:stretch>
-        </p:blipFill>
-        <p:spPr bwMode="auto">
-          <a:xfrm>
-            <a:off x="9302260" y="3965453"/>
-            <a:ext cx="407015" cy="411711"/>
-          </a:xfrm>
-          <a:prstGeom prst="rect">
-            <a:avLst/>
-          </a:prstGeom>
-          <a:noFill/>
-          <a:ln>
-            <a:noFill/>
-          </a:ln>
-          <a:effectLst/>
-          <a:extLst>
-            <a:ext uri="{909E8E84-426E-40DD-AFC4-6F175D3DCCD1}">
-              <a14:hiddenFill xmlns:a14="http://schemas.microsoft.com/office/drawing/2010/main">
-                <a:solidFill>
-                  <a:schemeClr val="accent1"/>
-                </a:solidFill>
-              </a14:hiddenFill>
-            </a:ext>
-            <a:ext uri="{91240B29-F687-4F45-9708-019B960494DF}">
-              <a14:hiddenLine xmlns:a14="http://schemas.microsoft.com/office/drawing/2010/main" w="9525">
-                <a:solidFill>
-                  <a:schemeClr val="tx1"/>
-                </a:solidFill>
-                <a:miter lim="800000"/>
-                <a:headEnd/>
-                <a:tailEnd/>
-              </a14:hiddenLine>
-            </a:ext>
-            <a:ext uri="{AF507438-7753-43E0-B8FC-AC1667EBCBE1}">
-              <a14:hiddenEffects xmlns:a14="http://schemas.microsoft.com/office/drawing/2010/main">
-                <a:effectLst>
-                  <a:outerShdw dist="35921" dir="2700000" algn="ctr" rotWithShape="0">
-                    <a:schemeClr val="bg2"/>
-                  </a:outerShdw>
-                </a:effectLst>
-              </a14:hiddenEffects>
-            </a:ext>
-          </a:extLst>
-        </p:spPr>
-      </p:pic>
-      <p:pic>
-        <p:nvPicPr>
-          <p:cNvPr id="95" name="Picture 21"/>
-          <p:cNvPicPr>
-            <a:picLocks noChangeAspect="1" noChangeArrowheads="1"/>
-          </p:cNvPicPr>
-          <p:nvPr/>
-        </p:nvPicPr>
-        <p:blipFill>
-          <a:blip r:embed="rId12" cstate="print">
-            <a:extLst>
-              <a:ext uri="{28A0092B-C50C-407E-A947-70E740481C1C}">
-                <a14:useLocalDpi xmlns:a14="http://schemas.microsoft.com/office/drawing/2010/main" val="0"/>
-              </a:ext>
-            </a:extLst>
-          </a:blip>
-          <a:srcRect/>
-          <a:stretch>
-            <a:fillRect/>
-          </a:stretch>
-        </p:blipFill>
-        <p:spPr bwMode="auto">
-          <a:xfrm>
-            <a:off x="8839302" y="3957441"/>
-            <a:ext cx="407015" cy="411711"/>
-          </a:xfrm>
-          <a:prstGeom prst="rect">
-            <a:avLst/>
-          </a:prstGeom>
-          <a:noFill/>
-          <a:ln>
-            <a:noFill/>
-          </a:ln>
-          <a:effectLst/>
-          <a:extLst>
-            <a:ext uri="{909E8E84-426E-40DD-AFC4-6F175D3DCCD1}">
-              <a14:hiddenFill xmlns:a14="http://schemas.microsoft.com/office/drawing/2010/main">
-                <a:solidFill>
-                  <a:schemeClr val="accent1"/>
-                </a:solidFill>
-              </a14:hiddenFill>
-            </a:ext>
-            <a:ext uri="{91240B29-F687-4F45-9708-019B960494DF}">
-              <a14:hiddenLine xmlns:a14="http://schemas.microsoft.com/office/drawing/2010/main" w="9525">
-                <a:solidFill>
-                  <a:schemeClr val="tx1"/>
-                </a:solidFill>
-                <a:miter lim="800000"/>
-                <a:headEnd/>
-                <a:tailEnd/>
-              </a14:hiddenLine>
-            </a:ext>
-            <a:ext uri="{AF507438-7753-43E0-B8FC-AC1667EBCBE1}">
-              <a14:hiddenEffects xmlns:a14="http://schemas.microsoft.com/office/drawing/2010/main">
-                <a:effectLst>
-                  <a:outerShdw dist="35921" dir="2700000" algn="ctr" rotWithShape="0">
-                    <a:schemeClr val="bg2"/>
-                  </a:outerShdw>
-                </a:effectLst>
-              </a14:hiddenEffects>
-            </a:ext>
-          </a:extLst>
-        </p:spPr>
-      </p:pic>
-      <p:cxnSp>
-        <p:nvCxnSpPr>
-          <p:cNvPr id="96" name="肘形连接符 95"/>
-          <p:cNvCxnSpPr>
-            <a:stCxn id="75" idx="2"/>
-            <a:endCxn id="1045" idx="0"/>
-          </p:cNvCxnSpPr>
-          <p:nvPr/>
-        </p:nvCxnSpPr>
-        <p:spPr>
-          <a:xfrm rot="5400000">
-            <a:off x="8574476" y="3842086"/>
-            <a:ext cx="136312" cy="110422"/>
-          </a:xfrm>
-          <a:prstGeom prst="bentConnector3">
-            <a:avLst>
-              <a:gd name="adj1" fmla="val 50000"/>
-            </a:avLst>
-          </a:prstGeom>
-          <a:ln>
-            <a:solidFill>
-              <a:srgbClr val="C00000"/>
-            </a:solidFill>
-          </a:ln>
-        </p:spPr>
-        <p:style>
-          <a:lnRef idx="1">
-            <a:schemeClr val="accent1"/>
-          </a:lnRef>
-          <a:fillRef idx="0">
-            <a:schemeClr val="accent1"/>
-          </a:fillRef>
-          <a:effectRef idx="0">
-            <a:schemeClr val="accent1"/>
-          </a:effectRef>
-          <a:fontRef idx="minor">
-            <a:schemeClr val="tx1"/>
-          </a:fontRef>
-        </p:style>
-      </p:cxnSp>
-      <p:cxnSp>
-        <p:nvCxnSpPr>
-          <p:cNvPr id="99" name="肘形连接符 98"/>
-          <p:cNvCxnSpPr>
-            <a:stCxn id="75" idx="2"/>
-            <a:endCxn id="95" idx="0"/>
-          </p:cNvCxnSpPr>
-          <p:nvPr/>
-        </p:nvCxnSpPr>
-        <p:spPr>
-          <a:xfrm rot="16200000" flipH="1">
-            <a:off x="8806176" y="3720807"/>
-            <a:ext cx="128300" cy="344967"/>
-          </a:xfrm>
-          <a:prstGeom prst="bentConnector3">
-            <a:avLst>
-              <a:gd name="adj1" fmla="val 50000"/>
-            </a:avLst>
-          </a:prstGeom>
-          <a:ln>
-            <a:solidFill>
-              <a:srgbClr val="C00000"/>
-            </a:solidFill>
-          </a:ln>
-        </p:spPr>
-        <p:style>
-          <a:lnRef idx="1">
-            <a:schemeClr val="accent1"/>
-          </a:lnRef>
-          <a:fillRef idx="0">
-            <a:schemeClr val="accent1"/>
-          </a:fillRef>
-          <a:effectRef idx="0">
-            <a:schemeClr val="accent1"/>
-          </a:effectRef>
-          <a:fontRef idx="minor">
-            <a:schemeClr val="tx1"/>
-          </a:fontRef>
-        </p:style>
-      </p:cxnSp>
-      <p:cxnSp>
-        <p:nvCxnSpPr>
-          <p:cNvPr id="102" name="肘形连接符 101"/>
-          <p:cNvCxnSpPr>
-            <a:stCxn id="75" idx="2"/>
-            <a:endCxn id="94" idx="0"/>
-          </p:cNvCxnSpPr>
-          <p:nvPr/>
-        </p:nvCxnSpPr>
-        <p:spPr>
-          <a:xfrm rot="16200000" flipH="1">
-            <a:off x="9033649" y="3493334"/>
-            <a:ext cx="136312" cy="807925"/>
-          </a:xfrm>
-          <a:prstGeom prst="bentConnector3">
-            <a:avLst>
-              <a:gd name="adj1" fmla="val 50000"/>
-            </a:avLst>
-          </a:prstGeom>
-          <a:ln>
-            <a:solidFill>
-              <a:srgbClr val="C00000"/>
-            </a:solidFill>
-          </a:ln>
-        </p:spPr>
-        <p:style>
-          <a:lnRef idx="1">
-            <a:schemeClr val="accent1"/>
-          </a:lnRef>
-          <a:fillRef idx="0">
-            <a:schemeClr val="accent1"/>
-          </a:fillRef>
-          <a:effectRef idx="0">
-            <a:schemeClr val="accent1"/>
-          </a:effectRef>
-          <a:fontRef idx="minor">
-            <a:schemeClr val="tx1"/>
-          </a:fontRef>
-        </p:style>
-      </p:cxnSp>
-      <p:pic>
-        <p:nvPicPr>
-          <p:cNvPr id="1046" name="Picture 22"/>
-          <p:cNvPicPr>
-            <a:picLocks noChangeAspect="1" noChangeArrowheads="1"/>
-          </p:cNvPicPr>
-          <p:nvPr/>
-        </p:nvPicPr>
-        <p:blipFill>
-          <a:blip r:embed="rId13" cstate="print">
-            <a:extLst>
-              <a:ext uri="{28A0092B-C50C-407E-A947-70E740481C1C}">
-                <a14:useLocalDpi xmlns:a14="http://schemas.microsoft.com/office/drawing/2010/main" val="0"/>
-              </a:ext>
-            </a:extLst>
-          </a:blip>
-          <a:srcRect/>
-          <a:stretch>
-            <a:fillRect/>
-          </a:stretch>
-        </p:blipFill>
-        <p:spPr bwMode="auto">
-          <a:xfrm>
             <a:off x="9713337" y="1452576"/>
             <a:ext cx="451613" cy="404393"/>
           </a:xfrm>
@@ -5867,6 +5804,36 @@
           </a:p>
         </p:txBody>
       </p:sp>
+      <p:pic>
+        <p:nvPicPr>
+          <p:cNvPr id="2" name="图片 1"/>
+          <p:cNvPicPr>
+            <a:picLocks noChangeAspect="1"/>
+          </p:cNvPicPr>
+          <p:nvPr/>
+        </p:nvPicPr>
+        <p:blipFill>
+          <a:blip r:embed="rId13" cstate="print">
+            <a:extLst>
+              <a:ext uri="{28A0092B-C50C-407E-A947-70E740481C1C}">
+                <a14:useLocalDpi xmlns:a14="http://schemas.microsoft.com/office/drawing/2010/main" val="0"/>
+              </a:ext>
+            </a:extLst>
+          </a:blip>
+          <a:stretch>
+            <a:fillRect/>
+          </a:stretch>
+        </p:blipFill>
+        <p:spPr>
+          <a:xfrm>
+            <a:off x="936179" y="1844824"/>
+            <a:ext cx="2285739" cy="1267024"/>
+          </a:xfrm>
+          <a:prstGeom prst="rect">
+            <a:avLst/>
+          </a:prstGeom>
+        </p:spPr>
+      </p:pic>
     </p:spTree>
     <p:extLst>
       <p:ext uri="{BB962C8B-B14F-4D97-AF65-F5344CB8AC3E}">

--- a/images/arch.pptx
+++ b/images/arch.pptx
@@ -288,7 +288,7 @@
           <a:p>
             <a:fld id="{9E50BDAC-40CF-4CAB-92B6-8882156A02C4}" type="datetimeFigureOut">
               <a:rPr lang="zh-CN" altLang="en-US" smtClean="0"/>
-              <a:t>2026/5/14</a:t>
+              <a:t>2026/5/20</a:t>
             </a:fld>
             <a:endParaRPr lang="zh-CN" altLang="en-US"/>
           </a:p>
@@ -458,7 +458,7 @@
           <a:p>
             <a:fld id="{9E50BDAC-40CF-4CAB-92B6-8882156A02C4}" type="datetimeFigureOut">
               <a:rPr lang="zh-CN" altLang="en-US" smtClean="0"/>
-              <a:t>2026/5/14</a:t>
+              <a:t>2026/5/20</a:t>
             </a:fld>
             <a:endParaRPr lang="zh-CN" altLang="en-US"/>
           </a:p>
@@ -638,7 +638,7 @@
           <a:p>
             <a:fld id="{9E50BDAC-40CF-4CAB-92B6-8882156A02C4}" type="datetimeFigureOut">
               <a:rPr lang="zh-CN" altLang="en-US" smtClean="0"/>
-              <a:t>2026/5/14</a:t>
+              <a:t>2026/5/20</a:t>
             </a:fld>
             <a:endParaRPr lang="zh-CN" altLang="en-US"/>
           </a:p>
@@ -808,7 +808,7 @@
           <a:p>
             <a:fld id="{9E50BDAC-40CF-4CAB-92B6-8882156A02C4}" type="datetimeFigureOut">
               <a:rPr lang="zh-CN" altLang="en-US" smtClean="0"/>
-              <a:t>2026/5/14</a:t>
+              <a:t>2026/5/20</a:t>
             </a:fld>
             <a:endParaRPr lang="zh-CN" altLang="en-US"/>
           </a:p>
@@ -1054,7 +1054,7 @@
           <a:p>
             <a:fld id="{9E50BDAC-40CF-4CAB-92B6-8882156A02C4}" type="datetimeFigureOut">
               <a:rPr lang="zh-CN" altLang="en-US" smtClean="0"/>
-              <a:t>2026/5/14</a:t>
+              <a:t>2026/5/20</a:t>
             </a:fld>
             <a:endParaRPr lang="zh-CN" altLang="en-US"/>
           </a:p>
@@ -1342,7 +1342,7 @@
           <a:p>
             <a:fld id="{9E50BDAC-40CF-4CAB-92B6-8882156A02C4}" type="datetimeFigureOut">
               <a:rPr lang="zh-CN" altLang="en-US" smtClean="0"/>
-              <a:t>2026/5/14</a:t>
+              <a:t>2026/5/20</a:t>
             </a:fld>
             <a:endParaRPr lang="zh-CN" altLang="en-US"/>
           </a:p>
@@ -1764,7 +1764,7 @@
           <a:p>
             <a:fld id="{9E50BDAC-40CF-4CAB-92B6-8882156A02C4}" type="datetimeFigureOut">
               <a:rPr lang="zh-CN" altLang="en-US" smtClean="0"/>
-              <a:t>2026/5/14</a:t>
+              <a:t>2026/5/20</a:t>
             </a:fld>
             <a:endParaRPr lang="zh-CN" altLang="en-US"/>
           </a:p>
@@ -1882,7 +1882,7 @@
           <a:p>
             <a:fld id="{9E50BDAC-40CF-4CAB-92B6-8882156A02C4}" type="datetimeFigureOut">
               <a:rPr lang="zh-CN" altLang="en-US" smtClean="0"/>
-              <a:t>2026/5/14</a:t>
+              <a:t>2026/5/20</a:t>
             </a:fld>
             <a:endParaRPr lang="zh-CN" altLang="en-US"/>
           </a:p>
@@ -1977,7 +1977,7 @@
           <a:p>
             <a:fld id="{9E50BDAC-40CF-4CAB-92B6-8882156A02C4}" type="datetimeFigureOut">
               <a:rPr lang="zh-CN" altLang="en-US" smtClean="0"/>
-              <a:t>2026/5/14</a:t>
+              <a:t>2026/5/20</a:t>
             </a:fld>
             <a:endParaRPr lang="zh-CN" altLang="en-US"/>
           </a:p>
@@ -2254,7 +2254,7 @@
           <a:p>
             <a:fld id="{9E50BDAC-40CF-4CAB-92B6-8882156A02C4}" type="datetimeFigureOut">
               <a:rPr lang="zh-CN" altLang="en-US" smtClean="0"/>
-              <a:t>2026/5/14</a:t>
+              <a:t>2026/5/20</a:t>
             </a:fld>
             <a:endParaRPr lang="zh-CN" altLang="en-US"/>
           </a:p>
@@ -2507,7 +2507,7 @@
           <a:p>
             <a:fld id="{9E50BDAC-40CF-4CAB-92B6-8882156A02C4}" type="datetimeFigureOut">
               <a:rPr lang="zh-CN" altLang="en-US" smtClean="0"/>
-              <a:t>2026/5/14</a:t>
+              <a:t>2026/5/20</a:t>
             </a:fld>
             <a:endParaRPr lang="zh-CN" altLang="en-US"/>
           </a:p>
@@ -2720,7 +2720,7 @@
           <a:p>
             <a:fld id="{9E50BDAC-40CF-4CAB-92B6-8882156A02C4}" type="datetimeFigureOut">
               <a:rPr lang="zh-CN" altLang="en-US" smtClean="0"/>
-              <a:t>2026/5/14</a:t>
+              <a:t>2026/5/20</a:t>
             </a:fld>
             <a:endParaRPr lang="zh-CN" altLang="en-US"/>
           </a:p>
@@ -5806,9 +5806,9 @@
       </p:sp>
       <p:pic>
         <p:nvPicPr>
-          <p:cNvPr id="2" name="图片 1"/>
+          <p:cNvPr id="1026" name="Picture 2"/>
           <p:cNvPicPr>
-            <a:picLocks noChangeAspect="1"/>
+            <a:picLocks noChangeAspect="1" noChangeArrowheads="1"/>
           </p:cNvPicPr>
           <p:nvPr/>
         </p:nvPicPr>
@@ -5820,18 +5820,52 @@
               </a:ext>
             </a:extLst>
           </a:blip>
+          <a:srcRect/>
           <a:stretch>
             <a:fillRect/>
           </a:stretch>
         </p:blipFill>
-        <p:spPr>
+        <p:spPr bwMode="auto">
           <a:xfrm>
-            <a:off x="936179" y="1844824"/>
-            <a:ext cx="2285739" cy="1267024"/>
+            <a:off x="936179" y="1844823"/>
+            <a:ext cx="2315828" cy="1281813"/>
           </a:xfrm>
           <a:prstGeom prst="rect">
             <a:avLst/>
           </a:prstGeom>
+          <a:noFill/>
+          <a:ln>
+            <a:noFill/>
+          </a:ln>
+          <a:effectLst/>
+          <a:extLst>
+            <a:ext uri="{909E8E84-426E-40DD-AFC4-6F175D3DCCD1}">
+              <a14:hiddenFill xmlns:a14="http://schemas.microsoft.com/office/drawing/2010/main">
+                <a:solidFill>
+                  <a:schemeClr val="accent1"/>
+                </a:solidFill>
+              </a14:hiddenFill>
+            </a:ext>
+            <a:ext uri="{91240B29-F687-4F45-9708-019B960494DF}">
+              <a14:hiddenLine xmlns:a14="http://schemas.microsoft.com/office/drawing/2010/main" w="9525">
+                <a:solidFill>
+                  <a:schemeClr val="tx1"/>
+                </a:solidFill>
+                <a:miter lim="800000"/>
+                <a:headEnd/>
+                <a:tailEnd/>
+              </a14:hiddenLine>
+            </a:ext>
+            <a:ext uri="{AF507438-7753-43E0-B8FC-AC1667EBCBE1}">
+              <a14:hiddenEffects xmlns:a14="http://schemas.microsoft.com/office/drawing/2010/main">
+                <a:effectLst>
+                  <a:outerShdw dist="35921" dir="2700000" algn="ctr" rotWithShape="0">
+                    <a:schemeClr val="bg2"/>
+                  </a:outerShdw>
+                </a:effectLst>
+              </a14:hiddenEffects>
+            </a:ext>
+          </a:extLst>
         </p:spPr>
       </p:pic>
     </p:spTree>

--- a/images/arch.pptx
+++ b/images/arch.pptx
@@ -288,7 +288,7 @@
           <a:p>
             <a:fld id="{9E50BDAC-40CF-4CAB-92B6-8882156A02C4}" type="datetimeFigureOut">
               <a:rPr lang="zh-CN" altLang="en-US" smtClean="0"/>
-              <a:t>2026/5/20</a:t>
+              <a:t>2026/5/23</a:t>
             </a:fld>
             <a:endParaRPr lang="zh-CN" altLang="en-US"/>
           </a:p>
@@ -458,7 +458,7 @@
           <a:p>
             <a:fld id="{9E50BDAC-40CF-4CAB-92B6-8882156A02C4}" type="datetimeFigureOut">
               <a:rPr lang="zh-CN" altLang="en-US" smtClean="0"/>
-              <a:t>2026/5/20</a:t>
+              <a:t>2026/5/23</a:t>
             </a:fld>
             <a:endParaRPr lang="zh-CN" altLang="en-US"/>
           </a:p>
@@ -638,7 +638,7 @@
           <a:p>
             <a:fld id="{9E50BDAC-40CF-4CAB-92B6-8882156A02C4}" type="datetimeFigureOut">
               <a:rPr lang="zh-CN" altLang="en-US" smtClean="0"/>
-              <a:t>2026/5/20</a:t>
+              <a:t>2026/5/23</a:t>
             </a:fld>
             <a:endParaRPr lang="zh-CN" altLang="en-US"/>
           </a:p>
@@ -808,7 +808,7 @@
           <a:p>
             <a:fld id="{9E50BDAC-40CF-4CAB-92B6-8882156A02C4}" type="datetimeFigureOut">
               <a:rPr lang="zh-CN" altLang="en-US" smtClean="0"/>
-              <a:t>2026/5/20</a:t>
+              <a:t>2026/5/23</a:t>
             </a:fld>
             <a:endParaRPr lang="zh-CN" altLang="en-US"/>
           </a:p>
@@ -1054,7 +1054,7 @@
           <a:p>
             <a:fld id="{9E50BDAC-40CF-4CAB-92B6-8882156A02C4}" type="datetimeFigureOut">
               <a:rPr lang="zh-CN" altLang="en-US" smtClean="0"/>
-              <a:t>2026/5/20</a:t>
+              <a:t>2026/5/23</a:t>
             </a:fld>
             <a:endParaRPr lang="zh-CN" altLang="en-US"/>
           </a:p>
@@ -1342,7 +1342,7 @@
           <a:p>
             <a:fld id="{9E50BDAC-40CF-4CAB-92B6-8882156A02C4}" type="datetimeFigureOut">
               <a:rPr lang="zh-CN" altLang="en-US" smtClean="0"/>
-              <a:t>2026/5/20</a:t>
+              <a:t>2026/5/23</a:t>
             </a:fld>
             <a:endParaRPr lang="zh-CN" altLang="en-US"/>
           </a:p>
@@ -1764,7 +1764,7 @@
           <a:p>
             <a:fld id="{9E50BDAC-40CF-4CAB-92B6-8882156A02C4}" type="datetimeFigureOut">
               <a:rPr lang="zh-CN" altLang="en-US" smtClean="0"/>
-              <a:t>2026/5/20</a:t>
+              <a:t>2026/5/23</a:t>
             </a:fld>
             <a:endParaRPr lang="zh-CN" altLang="en-US"/>
           </a:p>
@@ -1882,7 +1882,7 @@
           <a:p>
             <a:fld id="{9E50BDAC-40CF-4CAB-92B6-8882156A02C4}" type="datetimeFigureOut">
               <a:rPr lang="zh-CN" altLang="en-US" smtClean="0"/>
-              <a:t>2026/5/20</a:t>
+              <a:t>2026/5/23</a:t>
             </a:fld>
             <a:endParaRPr lang="zh-CN" altLang="en-US"/>
           </a:p>
@@ -1977,7 +1977,7 @@
           <a:p>
             <a:fld id="{9E50BDAC-40CF-4CAB-92B6-8882156A02C4}" type="datetimeFigureOut">
               <a:rPr lang="zh-CN" altLang="en-US" smtClean="0"/>
-              <a:t>2026/5/20</a:t>
+              <a:t>2026/5/23</a:t>
             </a:fld>
             <a:endParaRPr lang="zh-CN" altLang="en-US"/>
           </a:p>
@@ -2254,7 +2254,7 @@
           <a:p>
             <a:fld id="{9E50BDAC-40CF-4CAB-92B6-8882156A02C4}" type="datetimeFigureOut">
               <a:rPr lang="zh-CN" altLang="en-US" smtClean="0"/>
-              <a:t>2026/5/20</a:t>
+              <a:t>2026/5/23</a:t>
             </a:fld>
             <a:endParaRPr lang="zh-CN" altLang="en-US"/>
           </a:p>
@@ -2507,7 +2507,7 @@
           <a:p>
             <a:fld id="{9E50BDAC-40CF-4CAB-92B6-8882156A02C4}" type="datetimeFigureOut">
               <a:rPr lang="zh-CN" altLang="en-US" smtClean="0"/>
-              <a:t>2026/5/20</a:t>
+              <a:t>2026/5/23</a:t>
             </a:fld>
             <a:endParaRPr lang="zh-CN" altLang="en-US"/>
           </a:p>
@@ -2720,7 +2720,7 @@
           <a:p>
             <a:fld id="{9E50BDAC-40CF-4CAB-92B6-8882156A02C4}" type="datetimeFigureOut">
               <a:rPr lang="zh-CN" altLang="en-US" smtClean="0"/>
-              <a:t>2026/5/20</a:t>
+              <a:t>2026/5/23</a:t>
             </a:fld>
             <a:endParaRPr lang="zh-CN" altLang="en-US"/>
           </a:p>
@@ -4092,7 +4092,7 @@
         </p:nvSpPr>
         <p:spPr>
           <a:xfrm>
-            <a:off x="6857116" y="2420888"/>
+            <a:off x="6857116" y="2492896"/>
             <a:ext cx="895680" cy="383969"/>
           </a:xfrm>
           <a:prstGeom prst="rect">
@@ -4393,7 +4393,7 @@
         </p:nvGrpSpPr>
         <p:grpSpPr>
           <a:xfrm>
-            <a:off x="7872625" y="2482315"/>
+            <a:off x="7872625" y="2554323"/>
             <a:ext cx="593705" cy="261242"/>
             <a:chOff x="7350247" y="2758068"/>
             <a:chExt cx="606129" cy="261242"/>
@@ -4491,7 +4491,7 @@
         </p:nvSpPr>
         <p:spPr>
           <a:xfrm>
-            <a:off x="8661683" y="2420888"/>
+            <a:off x="8661683" y="2492896"/>
             <a:ext cx="915456" cy="383969"/>
           </a:xfrm>
           <a:prstGeom prst="rect">
@@ -4572,7 +4572,7 @@
         </p:nvCxnSpPr>
         <p:spPr>
           <a:xfrm>
-            <a:off x="8466330" y="2612752"/>
+            <a:off x="8466330" y="2684760"/>
             <a:ext cx="195353" cy="121"/>
           </a:xfrm>
           <a:prstGeom prst="straightConnector1">
@@ -4768,8 +4768,8 @@
         </p:nvCxnSpPr>
         <p:spPr>
           <a:xfrm rot="5400000">
-            <a:off x="8063355" y="2070581"/>
-            <a:ext cx="321780" cy="1790333"/>
+            <a:off x="8099359" y="2106585"/>
+            <a:ext cx="249772" cy="1790333"/>
           </a:xfrm>
           <a:prstGeom prst="bentConnector3">
             <a:avLst/>
@@ -4804,8 +4804,8 @@
         </p:nvCxnSpPr>
         <p:spPr>
           <a:xfrm rot="5400000">
-            <a:off x="8747738" y="2754964"/>
-            <a:ext cx="321780" cy="421567"/>
+            <a:off x="8783742" y="2790968"/>
+            <a:ext cx="249772" cy="421567"/>
           </a:xfrm>
           <a:prstGeom prst="bentConnector3">
             <a:avLst/>
@@ -5484,6 +5484,11 @@
           <a:prstGeom prst="line">
             <a:avLst/>
           </a:prstGeom>
+          <a:ln>
+            <a:solidFill>
+              <a:srgbClr val="C00000"/>
+            </a:solidFill>
+          </a:ln>
         </p:spPr>
         <p:style>
           <a:lnRef idx="1">
@@ -5508,7 +5513,7 @@
         </p:nvSpPr>
         <p:spPr>
           <a:xfrm>
-            <a:off x="5862125" y="1825537"/>
+            <a:off x="7973377" y="1825537"/>
             <a:ext cx="156765" cy="203879"/>
           </a:xfrm>
           <a:prstGeom prst="rect">
@@ -5555,12 +5560,17 @@
         </p:nvCxnSpPr>
         <p:spPr>
           <a:xfrm rot="5400000" flipH="1" flipV="1">
-            <a:off x="7058414" y="536867"/>
-            <a:ext cx="170765" cy="2406576"/>
+            <a:off x="8114040" y="1592493"/>
+            <a:ext cx="170765" cy="295324"/>
           </a:xfrm>
           <a:prstGeom prst="bentConnector2">
             <a:avLst/>
           </a:prstGeom>
+          <a:ln>
+            <a:solidFill>
+              <a:srgbClr val="C00000"/>
+            </a:solidFill>
+          </a:ln>
         </p:spPr>
         <p:style>
           <a:lnRef idx="1">
@@ -5588,7 +5598,7 @@
         </p:nvCxnSpPr>
         <p:spPr>
           <a:xfrm>
-            <a:off x="7752796" y="2612873"/>
+            <a:off x="7752796" y="2684881"/>
             <a:ext cx="119829" cy="3726"/>
           </a:xfrm>
           <a:prstGeom prst="straightConnector1">
@@ -5721,7 +5731,7 @@
         <p:spPr>
           <a:xfrm>
             <a:off x="6620445" y="2286029"/>
-            <a:ext cx="236671" cy="326844"/>
+            <a:ext cx="236671" cy="398852"/>
           </a:xfrm>
           <a:prstGeom prst="bentConnector3">
             <a:avLst/>
@@ -5868,6 +5878,155 @@
           </a:extLst>
         </p:spPr>
       </p:pic>
+      <p:sp>
+        <p:nvSpPr>
+          <p:cNvPr id="62" name="矩形 61"/>
+          <p:cNvSpPr/>
+          <p:nvPr/>
+        </p:nvSpPr>
+        <p:spPr>
+          <a:xfrm>
+            <a:off x="8224245" y="2110552"/>
+            <a:ext cx="1310023" cy="230355"/>
+          </a:xfrm>
+          <a:prstGeom prst="rect">
+            <a:avLst/>
+          </a:prstGeom>
+          <a:noFill/>
+          <a:ln w="6350">
+            <a:solidFill>
+              <a:schemeClr val="accent3">
+                <a:lumMod val="40000"/>
+                <a:lumOff val="60000"/>
+              </a:schemeClr>
+            </a:solidFill>
+          </a:ln>
+        </p:spPr>
+        <p:style>
+          <a:lnRef idx="2">
+            <a:schemeClr val="accent1">
+              <a:shade val="50000"/>
+            </a:schemeClr>
+          </a:lnRef>
+          <a:fillRef idx="1">
+            <a:schemeClr val="accent1"/>
+          </a:fillRef>
+          <a:effectRef idx="0">
+            <a:schemeClr val="accent1"/>
+          </a:effectRef>
+          <a:fontRef idx="minor">
+            <a:schemeClr val="lt1"/>
+          </a:fontRef>
+        </p:style>
+        <p:txBody>
+          <a:bodyPr rtlCol="0" anchor="ctr"/>
+          <a:lstStyle/>
+          <a:p>
+            <a:pPr algn="ctr"/>
+            <a:r>
+              <a:rPr lang="en-US" altLang="zh-CN" sz="1050" dirty="0" smtClean="0">
+                <a:solidFill>
+                  <a:schemeClr val="tx1"/>
+                </a:solidFill>
+                <a:latin typeface="微软雅黑" panose="020B0503020204020204" pitchFamily="34" charset="-122"/>
+                <a:ea typeface="微软雅黑" panose="020B0503020204020204" pitchFamily="34" charset="-122"/>
+              </a:rPr>
+              <a:t>Audio </a:t>
+            </a:r>
+            <a:r>
+              <a:rPr lang="en-US" altLang="zh-CN" sz="1050" dirty="0" err="1" smtClean="0">
+                <a:solidFill>
+                  <a:schemeClr val="tx1"/>
+                </a:solidFill>
+                <a:latin typeface="微软雅黑" panose="020B0503020204020204" pitchFamily="34" charset="-122"/>
+                <a:ea typeface="微软雅黑" panose="020B0503020204020204" pitchFamily="34" charset="-122"/>
+              </a:rPr>
+              <a:t>Exeutor</a:t>
+            </a:r>
+            <a:endParaRPr lang="zh-CN" altLang="en-US" sz="1050" dirty="0">
+              <a:solidFill>
+                <a:schemeClr val="tx1"/>
+              </a:solidFill>
+              <a:latin typeface="微软雅黑" panose="020B0503020204020204" pitchFamily="34" charset="-122"/>
+              <a:ea typeface="微软雅黑" panose="020B0503020204020204" pitchFamily="34" charset="-122"/>
+            </a:endParaRPr>
+          </a:p>
+        </p:txBody>
+      </p:sp>
+      <p:cxnSp>
+        <p:nvCxnSpPr>
+          <p:cNvPr id="5" name="肘形连接符 4"/>
+          <p:cNvCxnSpPr>
+            <a:stCxn id="68" idx="0"/>
+            <a:endCxn id="62" idx="2"/>
+          </p:cNvCxnSpPr>
+          <p:nvPr/>
+        </p:nvCxnSpPr>
+        <p:spPr>
+          <a:xfrm rot="16200000" flipV="1">
+            <a:off x="8923340" y="2296825"/>
+            <a:ext cx="151989" cy="240154"/>
+          </a:xfrm>
+          <a:prstGeom prst="bentConnector3">
+            <a:avLst/>
+          </a:prstGeom>
+          <a:ln>
+            <a:tailEnd type="arrow"/>
+          </a:ln>
+        </p:spPr>
+        <p:style>
+          <a:lnRef idx="1">
+            <a:schemeClr val="accent1"/>
+          </a:lnRef>
+          <a:fillRef idx="0">
+            <a:schemeClr val="accent1"/>
+          </a:fillRef>
+          <a:effectRef idx="0">
+            <a:schemeClr val="accent1"/>
+          </a:effectRef>
+          <a:fontRef idx="minor">
+            <a:schemeClr val="tx1"/>
+          </a:fontRef>
+        </p:style>
+      </p:cxnSp>
+      <p:cxnSp>
+        <p:nvCxnSpPr>
+          <p:cNvPr id="10" name="肘形连接符 9"/>
+          <p:cNvCxnSpPr>
+            <a:stCxn id="62" idx="1"/>
+            <a:endCxn id="89" idx="2"/>
+          </p:cNvCxnSpPr>
+          <p:nvPr/>
+        </p:nvCxnSpPr>
+        <p:spPr>
+          <a:xfrm rot="10800000">
+            <a:off x="8051761" y="2029416"/>
+            <a:ext cx="172485" cy="196314"/>
+          </a:xfrm>
+          <a:prstGeom prst="bentConnector2">
+            <a:avLst/>
+          </a:prstGeom>
+          <a:ln>
+            <a:solidFill>
+              <a:srgbClr val="C00000"/>
+            </a:solidFill>
+          </a:ln>
+        </p:spPr>
+        <p:style>
+          <a:lnRef idx="1">
+            <a:schemeClr val="accent1"/>
+          </a:lnRef>
+          <a:fillRef idx="0">
+            <a:schemeClr val="accent1"/>
+          </a:fillRef>
+          <a:effectRef idx="0">
+            <a:schemeClr val="accent1"/>
+          </a:effectRef>
+          <a:fontRef idx="minor">
+            <a:schemeClr val="tx1"/>
+          </a:fontRef>
+        </p:style>
+      </p:cxnSp>
     </p:spTree>
     <p:extLst>
       <p:ext uri="{BB962C8B-B14F-4D97-AF65-F5344CB8AC3E}">
